--- a/production/slides/08-u2-ch8-slides.pptx
+++ b/production/slides/08-u2-ch8-slides.pptx
@@ -13,6 +13,7 @@
     <p:sldId id="261" r:id="rId12"/>
     <p:sldId id="262" r:id="rId13"/>
     <p:sldId id="263" r:id="rId14"/>
+    <p:sldId id="272" r:id="rId23"/>
     <p:sldId id="264" r:id="rId15"/>
     <p:sldId id="265" r:id="rId16"/>
     <p:sldId id="266" r:id="rId17"/>
@@ -5126,6 +5127,369 @@
                 <a:latin typeface="Arial"/>
               </a:rPr>
               <a:t>C. It needs a special (volcanic) location.</a:t>
+            </a:r>
+          </a:p>
+        </p:txBody>
+      </p:sp>
+    </p:spTree>
+  </p:cSld>
+  <p:clrMapOvr>
+    <a:masterClrMapping/>
+  </p:clrMapOvr>
+</p:sld>
+</file>
+
+<file path=ppt/slides/slide17.xml><?xml version="1.0" encoding="utf-8"?>
+<p:sld xmlns:a="http://schemas.openxmlformats.org/drawingml/2006/main" xmlns:r="http://schemas.openxmlformats.org/officeDocument/2006/relationships" xmlns:p="http://schemas.openxmlformats.org/presentationml/2006/main">
+  <p:cSld>
+    <p:spTree>
+      <p:nvGrpSpPr>
+        <p:cNvPr id="1" name=""/>
+        <p:cNvGrpSpPr/>
+        <p:nvPr/>
+      </p:nvGrpSpPr>
+      <p:grpSpPr/>
+      <p:sp>
+        <p:nvSpPr>
+          <p:cNvPr id="2" name="Rectangle 1"/>
+          <p:cNvSpPr/>
+          <p:nvPr/>
+        </p:nvSpPr>
+        <p:spPr>
+          <a:xfrm>
+            <a:off x="0" y="0"/>
+            <a:ext cx="12191695" cy="6858000"/>
+          </a:xfrm>
+          <a:prstGeom prst="rect">
+            <a:avLst/>
+          </a:prstGeom>
+          <a:solidFill>
+            <a:srgbClr val="FAFAF8"/>
+          </a:solidFill>
+          <a:ln>
+            <a:noFill/>
+          </a:ln>
+          <a:effectLst/>
+        </p:spPr>
+        <p:style>
+          <a:lnRef idx="1">
+            <a:schemeClr val="accent1"/>
+          </a:lnRef>
+          <a:fillRef idx="3">
+            <a:schemeClr val="accent1"/>
+          </a:fillRef>
+          <a:effectRef idx="2">
+            <a:schemeClr val="accent1"/>
+          </a:effectRef>
+          <a:fontRef idx="minor">
+            <a:schemeClr val="lt1"/>
+          </a:fontRef>
+        </p:style>
+        <p:txBody>
+          <a:bodyPr rtlCol="0" anchor="ctr"/>
+          <a:lstStyle/>
+          <a:p>
+            <a:pPr algn="ctr"/>
+          </a:p>
+        </p:txBody>
+      </p:sp>
+      <p:sp>
+        <p:nvSpPr>
+          <p:cNvPr id="3" name="Rectangle 2"/>
+          <p:cNvSpPr/>
+          <p:nvPr/>
+        </p:nvSpPr>
+        <p:spPr>
+          <a:xfrm>
+            <a:off x="0" y="0"/>
+            <a:ext cx="12191695" cy="1417320"/>
+          </a:xfrm>
+          <a:prstGeom prst="rect">
+            <a:avLst/>
+          </a:prstGeom>
+          <a:solidFill>
+            <a:srgbClr val="2F3C7E"/>
+          </a:solidFill>
+          <a:ln>
+            <a:noFill/>
+          </a:ln>
+          <a:effectLst/>
+        </p:spPr>
+        <p:style>
+          <a:lnRef idx="1">
+            <a:schemeClr val="accent1"/>
+          </a:lnRef>
+          <a:fillRef idx="3">
+            <a:schemeClr val="accent1"/>
+          </a:fillRef>
+          <a:effectRef idx="2">
+            <a:schemeClr val="accent1"/>
+          </a:effectRef>
+          <a:fontRef idx="minor">
+            <a:schemeClr val="lt1"/>
+          </a:fontRef>
+        </p:style>
+        <p:txBody>
+          <a:bodyPr rtlCol="0" anchor="ctr"/>
+          <a:lstStyle/>
+          <a:p>
+            <a:pPr algn="ctr"/>
+          </a:p>
+        </p:txBody>
+      </p:sp>
+      <p:sp>
+        <p:nvSpPr>
+          <p:cNvPr id="4" name="TextBox 3"/>
+          <p:cNvSpPr txBox="1"/>
+          <p:nvPr/>
+        </p:nvSpPr>
+        <p:spPr>
+          <a:xfrm>
+            <a:off x="457200" y="109728"/>
+            <a:ext cx="10424160" cy="868680"/>
+          </a:xfrm>
+          <a:prstGeom prst="rect">
+            <a:avLst/>
+          </a:prstGeom>
+          <a:noFill/>
+        </p:spPr>
+        <p:txBody>
+          <a:bodyPr wrap="square" anchor="ctr">
+            <a:spAutoFit/>
+          </a:bodyPr>
+          <a:lstStyle/>
+          <a:p>
+            <a:pPr algn="l">
+              <a:spcAft>
+                <a:spcPts val="400"/>
+              </a:spcAft>
+            </a:pPr>
+            <a:r>
+              <a:rPr sz="3200" b="1">
+                <a:solidFill>
+                  <a:srgbClr val="FFFFFF"/>
+                </a:solidFill>
+                <a:latin typeface="Arial"/>
+              </a:rPr>
+              <a:t>Sunlight &amp; Earth Heat — Solar and Geothermal</a:t>
+            </a:r>
+          </a:p>
+        </p:txBody>
+      </p:sp>
+      <p:sp>
+        <p:nvSpPr>
+          <p:cNvPr id="5" name="TextBox 4"/>
+          <p:cNvSpPr txBox="1"/>
+          <p:nvPr/>
+        </p:nvSpPr>
+        <p:spPr>
+          <a:xfrm>
+            <a:off x="457200" y="1024128"/>
+            <a:ext cx="10424160" cy="329184"/>
+          </a:xfrm>
+          <a:prstGeom prst="rect">
+            <a:avLst/>
+          </a:prstGeom>
+          <a:noFill/>
+        </p:spPr>
+        <p:txBody>
+          <a:bodyPr wrap="square" anchor="ctr">
+            <a:spAutoFit/>
+          </a:bodyPr>
+          <a:lstStyle/>
+          <a:p>
+            <a:pPr algn="l">
+              <a:spcAft>
+                <a:spcPts val="400"/>
+              </a:spcAft>
+            </a:pPr>
+            <a:r>
+              <a:rPr sz="1500" b="0">
+                <a:solidFill>
+                  <a:srgbClr val="C9D2E8"/>
+                </a:solidFill>
+                <a:latin typeface="Arial"/>
+              </a:rPr>
+              <a:t>Media placeholder · optional video · pending generation</a:t>
+            </a:r>
+          </a:p>
+        </p:txBody>
+      </p:sp>
+      <p:sp>
+        <p:nvSpPr>
+          <p:cNvPr id="6" name="TextBox 5"/>
+          <p:cNvSpPr txBox="1"/>
+          <p:nvPr/>
+        </p:nvSpPr>
+        <p:spPr>
+          <a:xfrm>
+            <a:off x="10607040" y="310896"/>
+            <a:ext cx="731520" cy="365760"/>
+          </a:xfrm>
+          <a:prstGeom prst="rect">
+            <a:avLst/>
+          </a:prstGeom>
+          <a:noFill/>
+        </p:spPr>
+        <p:txBody>
+          <a:bodyPr wrap="square" anchor="ctr">
+            <a:spAutoFit/>
+          </a:bodyPr>
+          <a:lstStyle/>
+          <a:p>
+            <a:pPr algn="r">
+              <a:spcAft>
+                <a:spcPts val="400"/>
+              </a:spcAft>
+            </a:pPr>
+            <a:r>
+              <a:rPr sz="1500" b="0">
+                <a:solidFill>
+                  <a:srgbClr val="C9D2E8"/>
+                </a:solidFill>
+                <a:latin typeface="Arial"/>
+              </a:rPr>
+              <a:t>9</a:t>
+            </a:r>
+          </a:p>
+        </p:txBody>
+      </p:sp>
+      <p:sp>
+        <p:nvSpPr>
+          <p:cNvPr id="7" name="Rounded Rectangle 6"/>
+          <p:cNvSpPr/>
+          <p:nvPr/>
+        </p:nvSpPr>
+        <p:spPr>
+          <a:xfrm>
+            <a:off x="10972800" y="256032"/>
+            <a:ext cx="1051560" cy="420624"/>
+          </a:xfrm>
+          <a:prstGeom prst="roundRect">
+            <a:avLst/>
+          </a:prstGeom>
+          <a:solidFill>
+            <a:srgbClr val="2F3C7E"/>
+          </a:solidFill>
+          <a:ln>
+            <a:noFill/>
+          </a:ln>
+          <a:effectLst/>
+        </p:spPr>
+        <p:style>
+          <a:lnRef idx="1">
+            <a:schemeClr val="accent1"/>
+          </a:lnRef>
+          <a:fillRef idx="3">
+            <a:schemeClr val="accent1"/>
+          </a:fillRef>
+          <a:effectRef idx="2">
+            <a:schemeClr val="accent1"/>
+          </a:effectRef>
+          <a:fontRef idx="minor">
+            <a:schemeClr val="lt1"/>
+          </a:fontRef>
+        </p:style>
+        <p:txBody>
+          <a:bodyPr rtlCol="0" anchor="ctr" wrap="none"/>
+          <a:lstStyle/>
+          <a:p>
+            <a:pPr algn="ctr"/>
+            <a:r>
+              <a:rPr sz="1100" b="1">
+                <a:solidFill>
+                  <a:srgbClr val="FFFFFF"/>
+                </a:solidFill>
+                <a:latin typeface="Arial"/>
+              </a:rPr>
+              <a:t>PLACEHOLDER</a:t>
+            </a:r>
+          </a:p>
+        </p:txBody>
+      </p:sp>
+      <p:sp>
+        <p:nvSpPr>
+          <p:cNvPr id="8" name="TextBox 7"/>
+          <p:cNvSpPr txBox="1"/>
+          <p:nvPr/>
+        </p:nvSpPr>
+        <p:spPr>
+          <a:xfrm>
+            <a:off x="822960" y="1700000"/>
+            <a:ext cx="10515600" cy="4400000"/>
+          </a:xfrm>
+          <a:prstGeom prst="rect">
+            <a:avLst/>
+          </a:prstGeom>
+          <a:noFill/>
+        </p:spPr>
+        <p:txBody>
+          <a:bodyPr wrap="square">
+            <a:spAutoFit/>
+          </a:bodyPr>
+          <a:lstStyle/>
+          <a:p>
+            <a:pPr>
+              <a:spcAft>
+                <a:spcPts val="1000"/>
+              </a:spcAft>
+            </a:pPr>
+            <a:r>
+              <a:rPr sz="2000" b="1">
+                <a:solidFill>
+                  <a:srgbClr val="1F1F1F"/>
+                </a:solidFill>
+                <a:latin typeface="Arial"/>
+              </a:rPr>
+              <a:t>Intended: ~2-minute compare/contrast clip (Week 8 Tuesday).</a:t>
+            </a:r>
+          </a:p>
+          <a:p>
+            <a:pPr>
+              <a:spcAft>
+                <a:spcPts val="1000"/>
+              </a:spcAft>
+            </a:pPr>
+            <a:r>
+              <a:rPr sz="2000" b="0">
+                <a:solidFill>
+                  <a:srgbClr val="1F1F1F"/>
+                </a:solidFill>
+                <a:latin typeface="Arial"/>
+              </a:rPr>
+              <a:t>Script ready: production/media/scripts/unit-02/07-solar-geothermal-final-script.md</a:t>
+            </a:r>
+          </a:p>
+          <a:p>
+            <a:pPr>
+              <a:spcAft>
+                <a:spcPts val="1000"/>
+              </a:spcAft>
+            </a:pPr>
+            <a:r>
+              <a:rPr sz="2000" b="0">
+                <a:solidFill>
+                  <a:srgbClr val="1F1F1F"/>
+                </a:solidFill>
+                <a:latin typeface="Arial"/>
+              </a:rPr>
+              <a:t>Covers: solar depends on available light; geothermal depends on underground heat.</a:t>
+            </a:r>
+          </a:p>
+          <a:p>
+            <a:pPr>
+              <a:spcAft>
+                <a:spcPts val="1000"/>
+              </a:spcAft>
+            </a:pPr>
+            <a:r>
+              <a:rPr sz="2000" b="0">
+                <a:solidFill>
+                  <a:srgbClr val="1F1F1F"/>
+                </a:solidFill>
+                <a:latin typeface="Arial"/>
+              </a:rPr>
+              <a:t>This slide is a drop-in slot — the deck teaches fully without the video.</a:t>
             </a:r>
           </a:p>
         </p:txBody>

--- a/production/slides/08-u2-ch8-slides.pptx
+++ b/production/slides/08-u2-ch8-slides.pptx
@@ -121,6 +121,441 @@
     </a:lvl9pPr>
   </p:defaultTextStyle>
 </p:presentation>
+</file>
+
+<file path=ppt/notesMasters/notesMaster1.xml><?xml version="1.0" encoding="utf-8"?>
+<p:notesMaster xmlns:a="http://schemas.openxmlformats.org/drawingml/2006/main" xmlns:p="http://schemas.openxmlformats.org/presentationml/2006/main" xmlns:r="http://schemas.openxmlformats.org/officeDocument/2006/relationships">
+  <p:cSld>
+    <p:bg>
+      <p:bgRef idx="1001">
+        <a:schemeClr val="bg1"/>
+      </p:bgRef>
+    </p:bg>
+    <p:spTree>
+      <p:nvGrpSpPr>
+        <p:cNvPr id="1" name=""/>
+        <p:cNvGrpSpPr/>
+        <p:nvPr/>
+      </p:nvGrpSpPr>
+      <p:grpSpPr>
+        <a:xfrm>
+          <a:off x="0" y="0"/>
+          <a:ext cx="0" cy="0"/>
+          <a:chOff x="0" y="0"/>
+          <a:chExt cx="0" cy="0"/>
+        </a:xfrm>
+      </p:grpSpPr>
+      <p:sp>
+        <p:nvSpPr>
+          <p:cNvPr id="2" name="Header Placeholder 1"/>
+          <p:cNvSpPr>
+            <a:spLocks noGrp="1"/>
+          </p:cNvSpPr>
+          <p:nvPr>
+            <p:ph type="hdr" sz="quarter"/>
+          </p:nvPr>
+        </p:nvSpPr>
+        <p:spPr>
+          <a:xfrm>
+            <a:off x="0" y="0"/>
+            <a:ext cx="2971800" cy="457200"/>
+          </a:xfrm>
+          <a:prstGeom prst="rect">
+            <a:avLst/>
+          </a:prstGeom>
+        </p:spPr>
+        <p:txBody>
+          <a:bodyPr vert="horz" lIns="91440" tIns="45720" rIns="91440" bIns="45720" rtlCol="0"/>
+          <a:lstStyle>
+            <a:lvl1pPr algn="l">
+              <a:defRPr sz="1200"/>
+            </a:lvl1pPr>
+          </a:lstStyle>
+          <a:p>
+            <a:endParaRPr lang="en-US"/>
+          </a:p>
+        </p:txBody>
+      </p:sp>
+      <p:sp>
+        <p:nvSpPr>
+          <p:cNvPr id="3" name="Date Placeholder 2"/>
+          <p:cNvSpPr>
+            <a:spLocks noGrp="1"/>
+          </p:cNvSpPr>
+          <p:nvPr>
+            <p:ph type="dt" idx="1"/>
+          </p:nvPr>
+        </p:nvSpPr>
+        <p:spPr>
+          <a:xfrm>
+            <a:off x="3884613" y="0"/>
+            <a:ext cx="2971800" cy="457200"/>
+          </a:xfrm>
+          <a:prstGeom prst="rect">
+            <a:avLst/>
+          </a:prstGeom>
+        </p:spPr>
+        <p:txBody>
+          <a:bodyPr vert="horz" lIns="91440" tIns="45720" rIns="91440" bIns="45720" rtlCol="0"/>
+          <a:lstStyle>
+            <a:lvl1pPr algn="r">
+              <a:defRPr sz="1200"/>
+            </a:lvl1pPr>
+          </a:lstStyle>
+          <a:p>
+            <a:fld id="{0F89C1C7-3DCD-1040-A9CF-14679D8B5DDD}" type="datetimeFigureOut">
+              <a:rPr lang="en-US" smtClean="0"/>
+              <a:t>10/17/16</a:t>
+            </a:fld>
+            <a:endParaRPr lang="en-US"/>
+          </a:p>
+        </p:txBody>
+      </p:sp>
+      <p:sp>
+        <p:nvSpPr>
+          <p:cNvPr id="4" name="Slide Image Placeholder 3"/>
+          <p:cNvSpPr>
+            <a:spLocks noGrp="1" noRot="1" noChangeAspect="1"/>
+          </p:cNvSpPr>
+          <p:nvPr>
+            <p:ph type="sldImg" idx="2"/>
+          </p:nvPr>
+        </p:nvSpPr>
+        <p:spPr>
+          <a:xfrm>
+            <a:off x="1143000" y="685800"/>
+            <a:ext cx="4572000" cy="3429000"/>
+          </a:xfrm>
+          <a:prstGeom prst="rect">
+            <a:avLst/>
+          </a:prstGeom>
+          <a:noFill/>
+          <a:ln w="12700">
+            <a:solidFill>
+              <a:prstClr val="black"/>
+            </a:solidFill>
+          </a:ln>
+        </p:spPr>
+        <p:txBody>
+          <a:bodyPr vert="horz" lIns="91440" tIns="45720" rIns="91440" bIns="45720" rtlCol="0" anchor="ctr"/>
+          <a:lstStyle/>
+          <a:p>
+            <a:endParaRPr lang="en-US"/>
+          </a:p>
+        </p:txBody>
+      </p:sp>
+      <p:sp>
+        <p:nvSpPr>
+          <p:cNvPr id="5" name="Notes Placeholder 4"/>
+          <p:cNvSpPr>
+            <a:spLocks noGrp="1"/>
+          </p:cNvSpPr>
+          <p:nvPr>
+            <p:ph type="body" sz="quarter" idx="3"/>
+          </p:nvPr>
+        </p:nvSpPr>
+        <p:spPr>
+          <a:xfrm>
+            <a:off x="685800" y="4343400"/>
+            <a:ext cx="5486400" cy="4114800"/>
+          </a:xfrm>
+          <a:prstGeom prst="rect">
+            <a:avLst/>
+          </a:prstGeom>
+        </p:spPr>
+        <p:txBody>
+          <a:bodyPr vert="horz" lIns="91440" tIns="45720" rIns="91440" bIns="45720" rtlCol="0"/>
+          <a:lstStyle/>
+          <a:p>
+            <a:pPr lvl="0"/>
+            <a:r>
+              <a:rPr lang="en-US" smtClean="0"/>
+              <a:t>Click to edit Master text styles</a:t>
+            </a:r>
+          </a:p>
+          <a:p>
+            <a:pPr lvl="1"/>
+            <a:r>
+              <a:rPr lang="en-US" smtClean="0"/>
+              <a:t>Second level</a:t>
+            </a:r>
+          </a:p>
+          <a:p>
+            <a:pPr lvl="2"/>
+            <a:r>
+              <a:rPr lang="en-US" smtClean="0"/>
+              <a:t>Third level</a:t>
+            </a:r>
+          </a:p>
+          <a:p>
+            <a:pPr lvl="3"/>
+            <a:r>
+              <a:rPr lang="en-US" smtClean="0"/>
+              <a:t>Fourth level</a:t>
+            </a:r>
+          </a:p>
+          <a:p>
+            <a:pPr lvl="4"/>
+            <a:r>
+              <a:rPr lang="en-US" smtClean="0"/>
+              <a:t>Fifth level</a:t>
+            </a:r>
+            <a:endParaRPr lang="en-US"/>
+          </a:p>
+        </p:txBody>
+      </p:sp>
+      <p:sp>
+        <p:nvSpPr>
+          <p:cNvPr id="6" name="Footer Placeholder 5"/>
+          <p:cNvSpPr>
+            <a:spLocks noGrp="1"/>
+          </p:cNvSpPr>
+          <p:nvPr>
+            <p:ph type="ftr" sz="quarter" idx="4"/>
+          </p:nvPr>
+        </p:nvSpPr>
+        <p:spPr>
+          <a:xfrm>
+            <a:off x="0" y="8685213"/>
+            <a:ext cx="2971800" cy="457200"/>
+          </a:xfrm>
+          <a:prstGeom prst="rect">
+            <a:avLst/>
+          </a:prstGeom>
+        </p:spPr>
+        <p:txBody>
+          <a:bodyPr vert="horz" lIns="91440" tIns="45720" rIns="91440" bIns="45720" rtlCol="0" anchor="b"/>
+          <a:lstStyle>
+            <a:lvl1pPr algn="l">
+              <a:defRPr sz="1200"/>
+            </a:lvl1pPr>
+          </a:lstStyle>
+          <a:p>
+            <a:endParaRPr lang="en-US"/>
+          </a:p>
+        </p:txBody>
+      </p:sp>
+      <p:sp>
+        <p:nvSpPr>
+          <p:cNvPr id="7" name="Slide Number Placeholder 6"/>
+          <p:cNvSpPr>
+            <a:spLocks noGrp="1"/>
+          </p:cNvSpPr>
+          <p:nvPr>
+            <p:ph type="sldNum" sz="quarter" idx="5"/>
+          </p:nvPr>
+        </p:nvSpPr>
+        <p:spPr>
+          <a:xfrm>
+            <a:off x="3884613" y="8685213"/>
+            <a:ext cx="2971800" cy="457200"/>
+          </a:xfrm>
+          <a:prstGeom prst="rect">
+            <a:avLst/>
+          </a:prstGeom>
+        </p:spPr>
+        <p:txBody>
+          <a:bodyPr vert="horz" lIns="91440" tIns="45720" rIns="91440" bIns="45720" rtlCol="0" anchor="b"/>
+          <a:lstStyle>
+            <a:lvl1pPr algn="r">
+              <a:defRPr sz="1200"/>
+            </a:lvl1pPr>
+          </a:lstStyle>
+          <a:p>
+            <a:fld id="{BB5E49A5-4136-284D-997B-48E1D791AD67}" type="slidenum">
+              <a:rPr lang="en-US" smtClean="0"/>
+              <a:t>‹#›</a:t>
+            </a:fld>
+            <a:endParaRPr lang="en-US"/>
+          </a:p>
+        </p:txBody>
+      </p:sp>
+    </p:spTree>
+    <p:extLst>
+      <p:ext uri="{BB962C8B-B14F-4D97-AF65-F5344CB8AC3E}">
+        <p14:creationId xmlns:p14="http://schemas.microsoft.com/office/powerpoint/2010/main" val="2623252185"/>
+      </p:ext>
+    </p:extLst>
+  </p:cSld>
+  <p:clrMap bg1="lt1" tx1="dk1" bg2="lt2" tx2="dk2" accent1="accent1" accent2="accent2" accent3="accent3" accent4="accent4" accent5="accent5" accent6="accent6" hlink="hlink" folHlink="folHlink"/>
+  <p:notesStyle>
+    <a:lvl1pPr marL="0" algn="l" defTabSz="457200" rtl="0" eaLnBrk="1" latinLnBrk="0" hangingPunct="1">
+      <a:defRPr sz="1200" kern="1200">
+        <a:solidFill>
+          <a:schemeClr val="tx1"/>
+        </a:solidFill>
+        <a:latin typeface="+mn-lt"/>
+        <a:ea typeface="+mn-ea"/>
+        <a:cs typeface="+mn-cs"/>
+      </a:defRPr>
+    </a:lvl1pPr>
+    <a:lvl2pPr marL="457200" algn="l" defTabSz="457200" rtl="0" eaLnBrk="1" latinLnBrk="0" hangingPunct="1">
+      <a:defRPr sz="1200" kern="1200">
+        <a:solidFill>
+          <a:schemeClr val="tx1"/>
+        </a:solidFill>
+        <a:latin typeface="+mn-lt"/>
+        <a:ea typeface="+mn-ea"/>
+        <a:cs typeface="+mn-cs"/>
+      </a:defRPr>
+    </a:lvl2pPr>
+    <a:lvl3pPr marL="914400" algn="l" defTabSz="457200" rtl="0" eaLnBrk="1" latinLnBrk="0" hangingPunct="1">
+      <a:defRPr sz="1200" kern="1200">
+        <a:solidFill>
+          <a:schemeClr val="tx1"/>
+        </a:solidFill>
+        <a:latin typeface="+mn-lt"/>
+        <a:ea typeface="+mn-ea"/>
+        <a:cs typeface="+mn-cs"/>
+      </a:defRPr>
+    </a:lvl3pPr>
+    <a:lvl4pPr marL="1371600" algn="l" defTabSz="457200" rtl="0" eaLnBrk="1" latinLnBrk="0" hangingPunct="1">
+      <a:defRPr sz="1200" kern="1200">
+        <a:solidFill>
+          <a:schemeClr val="tx1"/>
+        </a:solidFill>
+        <a:latin typeface="+mn-lt"/>
+        <a:ea typeface="+mn-ea"/>
+        <a:cs typeface="+mn-cs"/>
+      </a:defRPr>
+    </a:lvl4pPr>
+    <a:lvl5pPr marL="1828800" algn="l" defTabSz="457200" rtl="0" eaLnBrk="1" latinLnBrk="0" hangingPunct="1">
+      <a:defRPr sz="1200" kern="1200">
+        <a:solidFill>
+          <a:schemeClr val="tx1"/>
+        </a:solidFill>
+        <a:latin typeface="+mn-lt"/>
+        <a:ea typeface="+mn-ea"/>
+        <a:cs typeface="+mn-cs"/>
+      </a:defRPr>
+    </a:lvl5pPr>
+    <a:lvl6pPr marL="2286000" algn="l" defTabSz="457200" rtl="0" eaLnBrk="1" latinLnBrk="0" hangingPunct="1">
+      <a:defRPr sz="1200" kern="1200">
+        <a:solidFill>
+          <a:schemeClr val="tx1"/>
+        </a:solidFill>
+        <a:latin typeface="+mn-lt"/>
+        <a:ea typeface="+mn-ea"/>
+        <a:cs typeface="+mn-cs"/>
+      </a:defRPr>
+    </a:lvl6pPr>
+    <a:lvl7pPr marL="2743200" algn="l" defTabSz="457200" rtl="0" eaLnBrk="1" latinLnBrk="0" hangingPunct="1">
+      <a:defRPr sz="1200" kern="1200">
+        <a:solidFill>
+          <a:schemeClr val="tx1"/>
+        </a:solidFill>
+        <a:latin typeface="+mn-lt"/>
+        <a:ea typeface="+mn-ea"/>
+        <a:cs typeface="+mn-cs"/>
+      </a:defRPr>
+    </a:lvl7pPr>
+    <a:lvl8pPr marL="3200400" algn="l" defTabSz="457200" rtl="0" eaLnBrk="1" latinLnBrk="0" hangingPunct="1">
+      <a:defRPr sz="1200" kern="1200">
+        <a:solidFill>
+          <a:schemeClr val="tx1"/>
+        </a:solidFill>
+        <a:latin typeface="+mn-lt"/>
+        <a:ea typeface="+mn-ea"/>
+        <a:cs typeface="+mn-cs"/>
+      </a:defRPr>
+    </a:lvl8pPr>
+    <a:lvl9pPr marL="3657600" algn="l" defTabSz="457200" rtl="0" eaLnBrk="1" latinLnBrk="0" hangingPunct="1">
+      <a:defRPr sz="1200" kern="1200">
+        <a:solidFill>
+          <a:schemeClr val="tx1"/>
+        </a:solidFill>
+        <a:latin typeface="+mn-lt"/>
+        <a:ea typeface="+mn-ea"/>
+        <a:cs typeface="+mn-cs"/>
+      </a:defRPr>
+    </a:lvl9pPr>
+  </p:notesStyle>
+</p:notesMaster>
+</file>
+
+<file path=ppt/notesSlides/notesSlide1.xml><?xml version="1.0" encoding="utf-8"?>
+<p:notes xmlns:a="http://schemas.openxmlformats.org/drawingml/2006/main" xmlns:p="http://schemas.openxmlformats.org/presentationml/2006/main" xmlns:r="http://schemas.openxmlformats.org/officeDocument/2006/relationships">
+  <p:cSld>
+    <p:spTree>
+      <p:nvGrpSpPr>
+        <p:cNvPr id="1" name=""/>
+        <p:cNvGrpSpPr/>
+        <p:nvPr/>
+      </p:nvGrpSpPr>
+      <p:grpSpPr>
+        <a:xfrm>
+          <a:off x="0" y="0"/>
+          <a:ext cx="0" cy="0"/>
+          <a:chOff x="0" y="0"/>
+          <a:chExt cx="0" cy="0"/>
+        </a:xfrm>
+      </p:grpSpPr>
+      <p:sp>
+        <p:nvSpPr>
+          <p:cNvPr id="2" name="Slide Image Placeholder 1"/>
+          <p:cNvSpPr>
+            <a:spLocks noGrp="1"/>
+          </p:cNvSpPr>
+          <p:nvPr>
+            <p:ph type="sldImg" idx="2"/>
+          </p:nvPr>
+        </p:nvSpPr>
+        <p:spPr/>
+      </p:sp>
+      <p:sp>
+        <p:nvSpPr>
+          <p:cNvPr id="3" name="Notes Placeholder 2"/>
+          <p:cNvSpPr>
+            <a:spLocks noGrp="1"/>
+          </p:cNvSpPr>
+          <p:nvPr>
+            <p:ph type="body" idx="3" sz="quarter"/>
+          </p:nvPr>
+        </p:nvSpPr>
+        <p:spPr/>
+        <p:txBody>
+          <a:bodyPr/>
+          <a:lstStyle/>
+          <a:p>
+            <a:r>
+              <a:t>Intended: ~2-minute compare/contrast clip (Week 8 Tuesday).</a:t>
+            </a:r>
+          </a:p>
+          <a:p>
+            <a:r>
+              <a:t>Script ready: production/media/scripts/unit-02/07-solar-geothermal-final-script.md</a:t>
+            </a:r>
+          </a:p>
+          <a:p>
+            <a:r>
+              <a:t>Covers: solar depends on available light; geothermal depends on underground heat.</a:t>
+            </a:r>
+          </a:p>
+          <a:p>
+            <a:r>
+              <a:t>This slide is a drop-in slot — the deck teaches fully without the video.</a:t>
+            </a:r>
+          </a:p>
+        </p:txBody>
+      </p:sp>
+      <p:sp>
+        <p:nvSpPr>
+          <p:cNvPr id="4" name="Slide Number Placeholder 3"/>
+          <p:cNvSpPr>
+            <a:spLocks noGrp="1"/>
+          </p:cNvSpPr>
+          <p:nvPr>
+            <p:ph type="sldNum" idx="5" sz="quarter"/>
+          </p:nvPr>
+        </p:nvSpPr>
+        <p:spPr/>
+      </p:sp>
+    </p:spTree>
+  </p:cSld>
+  <p:clrMapOvr>
+    <a:masterClrMapping/>
+  </p:clrMapOvr>
+</p:notes>
 </file>
 
 <file path=ppt/slideLayouts/slideLayout1.xml><?xml version="1.0" encoding="utf-8"?>
@@ -3386,7 +3821,7 @@
             <a:avLst/>
           </a:prstGeom>
           <a:solidFill>
-            <a:srgbClr val="3E7A4E"/>
+            <a:srgbClr val="2F3C7E"/>
           </a:solidFill>
           <a:ln>
             <a:noFill/>
@@ -3449,7 +3884,7 @@
                 </a:solidFill>
                 <a:latin typeface="Arial"/>
               </a:rPr>
-              <a:t>Answer</a:t>
+              <a:t>Review</a:t>
             </a:r>
           </a:p>
         </p:txBody>
@@ -3484,11 +3919,11 @@
             <a:r>
               <a:rPr sz="1400" b="0" i="0">
                 <a:solidFill>
-                  <a:srgbClr val="FFFFFF"/>
+                  <a:srgbClr val="C9D2E8"/>
                 </a:solidFill>
                 <a:latin typeface="Arial"/>
               </a:rPr>
-              <a:t>10</a:t>
+              <a:t>9</a:t>
             </a:r>
           </a:p>
         </p:txBody>
@@ -3501,8 +3936,8 @@
         </p:nvSpPr>
         <p:spPr>
           <a:xfrm>
-            <a:off x="822960" y="1645920"/>
-            <a:ext cx="10515600" cy="1828800"/>
+            <a:off x="822960" y="1463040"/>
+            <a:ext cx="10515600" cy="1188720"/>
           </a:xfrm>
           <a:prstGeom prst="rect">
             <a:avLst/>
@@ -3527,7 +3962,94 @@
                 </a:solidFill>
                 <a:latin typeface="Arial"/>
               </a:rPr>
-              <a:t>C. Heat transferred from Earth's interior.</a:t>
+              <a:t>Geothermal energy comes from —</a:t>
+            </a:r>
+          </a:p>
+        </p:txBody>
+      </p:sp>
+      <p:sp>
+        <p:nvSpPr>
+          <p:cNvPr id="7" name="TextBox 6"/>
+          <p:cNvSpPr txBox="1"/>
+          <p:nvPr/>
+        </p:nvSpPr>
+        <p:spPr>
+          <a:xfrm>
+            <a:off x="822960" y="2834640"/>
+            <a:ext cx="10515600" cy="3108960"/>
+          </a:xfrm>
+          <a:prstGeom prst="rect">
+            <a:avLst/>
+          </a:prstGeom>
+          <a:noFill/>
+        </p:spPr>
+        <p:txBody>
+          <a:bodyPr wrap="square" anchor="t">
+            <a:spAutoFit/>
+          </a:bodyPr>
+          <a:lstStyle/>
+          <a:p>
+            <a:pPr algn="l">
+              <a:spcAft>
+                <a:spcPts val="400"/>
+              </a:spcAft>
+            </a:pPr>
+            <a:r>
+              <a:rPr sz="2800" b="0" i="0">
+                <a:solidFill>
+                  <a:srgbClr val="1F1F1F"/>
+                </a:solidFill>
+                <a:latin typeface="Arial"/>
+              </a:rPr>
+              <a:t>A.  the sun</a:t>
+            </a:r>
+          </a:p>
+          <a:p>
+            <a:pPr algn="l">
+              <a:spcAft>
+                <a:spcPts val="400"/>
+              </a:spcAft>
+            </a:pPr>
+            <a:r>
+              <a:rPr sz="2800" b="0" i="0">
+                <a:solidFill>
+                  <a:srgbClr val="1F1F1F"/>
+                </a:solidFill>
+                <a:latin typeface="Arial"/>
+              </a:rPr>
+              <a:t>B.  wind</a:t>
+            </a:r>
+          </a:p>
+          <a:p>
+            <a:pPr algn="l">
+              <a:spcAft>
+                <a:spcPts val="400"/>
+              </a:spcAft>
+            </a:pPr>
+            <a:r>
+              <a:rPr sz="2800" b="0" i="0">
+                <a:solidFill>
+                  <a:srgbClr val="1F1F1F"/>
+                </a:solidFill>
+                <a:latin typeface="Arial"/>
+              </a:rPr>
+              <a:t>C.  heat inside Earth</a:t>
+            </a:r>
+          </a:p>
+          <a:p>
+            <a:pPr algn="l">
+              <a:spcAft>
+                <a:spcPts val="400"/>
+              </a:spcAft>
+            </a:pPr>
+            <a:r>
+              <a:rPr sz="2800" b="0" i="0">
+                <a:solidFill>
+                  <a:srgbClr val="1F1F1F"/>
+                </a:solidFill>
+                <a:latin typeface="Arial"/>
+              </a:rPr>
+              <a:t>D.  moving water</a:t>
             </a:r>
           </a:p>
         </p:txBody>
@@ -3609,7 +4131,7 @@
             <a:avLst/>
           </a:prstGeom>
           <a:solidFill>
-            <a:srgbClr val="2F3C7E"/>
+            <a:srgbClr val="3E7A4E"/>
           </a:solidFill>
           <a:ln>
             <a:noFill/>
@@ -3672,7 +4194,7 @@
                 </a:solidFill>
                 <a:latin typeface="Arial"/>
               </a:rPr>
-              <a:t>Review</a:t>
+              <a:t>Answer</a:t>
             </a:r>
           </a:p>
         </p:txBody>
@@ -3707,11 +4229,11 @@
             <a:r>
               <a:rPr sz="1400" b="0" i="0">
                 <a:solidFill>
-                  <a:srgbClr val="C9D2E8"/>
+                  <a:srgbClr val="FFFFFF"/>
                 </a:solidFill>
                 <a:latin typeface="Arial"/>
               </a:rPr>
-              <a:t>11</a:t>
+              <a:t>10</a:t>
             </a:r>
           </a:p>
         </p:txBody>
@@ -3724,8 +4246,8 @@
         </p:nvSpPr>
         <p:spPr>
           <a:xfrm>
-            <a:off x="822960" y="1463040"/>
-            <a:ext cx="10515600" cy="1188720"/>
+            <a:off x="822960" y="1645920"/>
+            <a:ext cx="10515600" cy="1828800"/>
           </a:xfrm>
           <a:prstGeom prst="rect">
             <a:avLst/>
@@ -3750,94 +4272,7 @@
                 </a:solidFill>
                 <a:latin typeface="Arial"/>
               </a:rPr>
-              <a:t>Where does geothermal work best?</a:t>
-            </a:r>
-          </a:p>
-        </p:txBody>
-      </p:sp>
-      <p:sp>
-        <p:nvSpPr>
-          <p:cNvPr id="7" name="TextBox 6"/>
-          <p:cNvSpPr txBox="1"/>
-          <p:nvPr/>
-        </p:nvSpPr>
-        <p:spPr>
-          <a:xfrm>
-            <a:off x="822960" y="2834640"/>
-            <a:ext cx="10515600" cy="3108960"/>
-          </a:xfrm>
-          <a:prstGeom prst="rect">
-            <a:avLst/>
-          </a:prstGeom>
-          <a:noFill/>
-        </p:spPr>
-        <p:txBody>
-          <a:bodyPr wrap="square" anchor="t">
-            <a:spAutoFit/>
-          </a:bodyPr>
-          <a:lstStyle/>
-          <a:p>
-            <a:pPr algn="l">
-              <a:spcAft>
-                <a:spcPts val="400"/>
-              </a:spcAft>
-            </a:pPr>
-            <a:r>
-              <a:rPr sz="2800" b="0" i="0">
-                <a:solidFill>
-                  <a:srgbClr val="1F1F1F"/>
-                </a:solidFill>
-                <a:latin typeface="Arial"/>
-              </a:rPr>
-              <a:t>A.  everywhere</a:t>
-            </a:r>
-          </a:p>
-          <a:p>
-            <a:pPr algn="l">
-              <a:spcAft>
-                <a:spcPts val="400"/>
-              </a:spcAft>
-            </a:pPr>
-            <a:r>
-              <a:rPr sz="2800" b="0" i="0">
-                <a:solidFill>
-                  <a:srgbClr val="1F1F1F"/>
-                </a:solidFill>
-                <a:latin typeface="Arial"/>
-              </a:rPr>
-              <a:t>B.  near hot rock / volcanic areas</a:t>
-            </a:r>
-          </a:p>
-          <a:p>
-            <a:pPr algn="l">
-              <a:spcAft>
-                <a:spcPts val="400"/>
-              </a:spcAft>
-            </a:pPr>
-            <a:r>
-              <a:rPr sz="2800" b="0" i="0">
-                <a:solidFill>
-                  <a:srgbClr val="1F1F1F"/>
-                </a:solidFill>
-                <a:latin typeface="Arial"/>
-              </a:rPr>
-              <a:t>C.  only at the poles</a:t>
-            </a:r>
-          </a:p>
-          <a:p>
-            <a:pPr algn="l">
-              <a:spcAft>
-                <a:spcPts val="400"/>
-              </a:spcAft>
-            </a:pPr>
-            <a:r>
-              <a:rPr sz="2800" b="0" i="0">
-                <a:solidFill>
-                  <a:srgbClr val="1F1F1F"/>
-                </a:solidFill>
-                <a:latin typeface="Arial"/>
-              </a:rPr>
-              <a:t>D.  only in deserts</a:t>
+              <a:t>C. Heat transferred from Earth's interior.</a:t>
             </a:r>
           </a:p>
         </p:txBody>
@@ -3919,7 +4354,7 @@
             <a:avLst/>
           </a:prstGeom>
           <a:solidFill>
-            <a:srgbClr val="3E7A4E"/>
+            <a:srgbClr val="2F3C7E"/>
           </a:solidFill>
           <a:ln>
             <a:noFill/>
@@ -3982,7 +4417,7 @@
                 </a:solidFill>
                 <a:latin typeface="Arial"/>
               </a:rPr>
-              <a:t>Answer</a:t>
+              <a:t>Review</a:t>
             </a:r>
           </a:p>
         </p:txBody>
@@ -4017,11 +4452,11 @@
             <a:r>
               <a:rPr sz="1400" b="0" i="0">
                 <a:solidFill>
-                  <a:srgbClr val="FFFFFF"/>
+                  <a:srgbClr val="C9D2E8"/>
                 </a:solidFill>
                 <a:latin typeface="Arial"/>
               </a:rPr>
-              <a:t>12</a:t>
+              <a:t>11</a:t>
             </a:r>
           </a:p>
         </p:txBody>
@@ -4034,8 +4469,8 @@
         </p:nvSpPr>
         <p:spPr>
           <a:xfrm>
-            <a:off x="822960" y="1645920"/>
-            <a:ext cx="10515600" cy="1828800"/>
+            <a:off x="822960" y="1463040"/>
+            <a:ext cx="10515600" cy="1188720"/>
           </a:xfrm>
           <a:prstGeom prst="rect">
             <a:avLst/>
@@ -4060,7 +4495,94 @@
                 </a:solidFill>
                 <a:latin typeface="Arial"/>
               </a:rPr>
-              <a:t>B. Areas where Earth's crust is active.</a:t>
+              <a:t>Where does geothermal work best?</a:t>
+            </a:r>
+          </a:p>
+        </p:txBody>
+      </p:sp>
+      <p:sp>
+        <p:nvSpPr>
+          <p:cNvPr id="7" name="TextBox 6"/>
+          <p:cNvSpPr txBox="1"/>
+          <p:nvPr/>
+        </p:nvSpPr>
+        <p:spPr>
+          <a:xfrm>
+            <a:off x="822960" y="2834640"/>
+            <a:ext cx="10515600" cy="3108960"/>
+          </a:xfrm>
+          <a:prstGeom prst="rect">
+            <a:avLst/>
+          </a:prstGeom>
+          <a:noFill/>
+        </p:spPr>
+        <p:txBody>
+          <a:bodyPr wrap="square" anchor="t">
+            <a:spAutoFit/>
+          </a:bodyPr>
+          <a:lstStyle/>
+          <a:p>
+            <a:pPr algn="l">
+              <a:spcAft>
+                <a:spcPts val="400"/>
+              </a:spcAft>
+            </a:pPr>
+            <a:r>
+              <a:rPr sz="2800" b="0" i="0">
+                <a:solidFill>
+                  <a:srgbClr val="1F1F1F"/>
+                </a:solidFill>
+                <a:latin typeface="Arial"/>
+              </a:rPr>
+              <a:t>A.  everywhere</a:t>
+            </a:r>
+          </a:p>
+          <a:p>
+            <a:pPr algn="l">
+              <a:spcAft>
+                <a:spcPts val="400"/>
+              </a:spcAft>
+            </a:pPr>
+            <a:r>
+              <a:rPr sz="2800" b="0" i="0">
+                <a:solidFill>
+                  <a:srgbClr val="1F1F1F"/>
+                </a:solidFill>
+                <a:latin typeface="Arial"/>
+              </a:rPr>
+              <a:t>B.  near hot rock / volcanic areas</a:t>
+            </a:r>
+          </a:p>
+          <a:p>
+            <a:pPr algn="l">
+              <a:spcAft>
+                <a:spcPts val="400"/>
+              </a:spcAft>
+            </a:pPr>
+            <a:r>
+              <a:rPr sz="2800" b="0" i="0">
+                <a:solidFill>
+                  <a:srgbClr val="1F1F1F"/>
+                </a:solidFill>
+                <a:latin typeface="Arial"/>
+              </a:rPr>
+              <a:t>C.  only at the poles</a:t>
+            </a:r>
+          </a:p>
+          <a:p>
+            <a:pPr algn="l">
+              <a:spcAft>
+                <a:spcPts val="400"/>
+              </a:spcAft>
+            </a:pPr>
+            <a:r>
+              <a:rPr sz="2800" b="0" i="0">
+                <a:solidFill>
+                  <a:srgbClr val="1F1F1F"/>
+                </a:solidFill>
+                <a:latin typeface="Arial"/>
+              </a:rPr>
+              <a:t>D.  only in deserts</a:t>
             </a:r>
           </a:p>
         </p:txBody>
@@ -4142,7 +4664,7 @@
             <a:avLst/>
           </a:prstGeom>
           <a:solidFill>
-            <a:srgbClr val="2F3C7E"/>
+            <a:srgbClr val="3E7A4E"/>
           </a:solidFill>
           <a:ln>
             <a:noFill/>
@@ -4205,7 +4727,7 @@
                 </a:solidFill>
                 <a:latin typeface="Arial"/>
               </a:rPr>
-              <a:t>Review</a:t>
+              <a:t>Answer</a:t>
             </a:r>
           </a:p>
         </p:txBody>
@@ -4240,11 +4762,11 @@
             <a:r>
               <a:rPr sz="1400" b="0" i="0">
                 <a:solidFill>
-                  <a:srgbClr val="C9D2E8"/>
+                  <a:srgbClr val="FFFFFF"/>
                 </a:solidFill>
                 <a:latin typeface="Arial"/>
               </a:rPr>
-              <a:t>13</a:t>
+              <a:t>12</a:t>
             </a:r>
           </a:p>
         </p:txBody>
@@ -4257,8 +4779,8 @@
         </p:nvSpPr>
         <p:spPr>
           <a:xfrm>
-            <a:off x="822960" y="1463040"/>
-            <a:ext cx="10515600" cy="1188720"/>
+            <a:off x="822960" y="1645920"/>
+            <a:ext cx="10515600" cy="1828800"/>
           </a:xfrm>
           <a:prstGeom prst="rect">
             <a:avLst/>
@@ -4283,94 +4805,7 @@
                 </a:solidFill>
                 <a:latin typeface="Arial"/>
               </a:rPr>
-              <a:t>Which is a BENEFIT of geothermal?</a:t>
-            </a:r>
-          </a:p>
-        </p:txBody>
-      </p:sp>
-      <p:sp>
-        <p:nvSpPr>
-          <p:cNvPr id="7" name="TextBox 6"/>
-          <p:cNvSpPr txBox="1"/>
-          <p:nvPr/>
-        </p:nvSpPr>
-        <p:spPr>
-          <a:xfrm>
-            <a:off x="822960" y="2834640"/>
-            <a:ext cx="10515600" cy="3108960"/>
-          </a:xfrm>
-          <a:prstGeom prst="rect">
-            <a:avLst/>
-          </a:prstGeom>
-          <a:noFill/>
-        </p:spPr>
-        <p:txBody>
-          <a:bodyPr wrap="square" anchor="t">
-            <a:spAutoFit/>
-          </a:bodyPr>
-          <a:lstStyle/>
-          <a:p>
-            <a:pPr algn="l">
-              <a:spcAft>
-                <a:spcPts val="400"/>
-              </a:spcAft>
-            </a:pPr>
-            <a:r>
-              <a:rPr sz="2800" b="0" i="0">
-                <a:solidFill>
-                  <a:srgbClr val="1F1F1F"/>
-                </a:solidFill>
-                <a:latin typeface="Arial"/>
-              </a:rPr>
-              <a:t>A.  little pollution</a:t>
-            </a:r>
-          </a:p>
-          <a:p>
-            <a:pPr algn="l">
-              <a:spcAft>
-                <a:spcPts val="400"/>
-              </a:spcAft>
-            </a:pPr>
-            <a:r>
-              <a:rPr sz="2800" b="0" i="0">
-                <a:solidFill>
-                  <a:srgbClr val="1F1F1F"/>
-                </a:solidFill>
-                <a:latin typeface="Arial"/>
-              </a:rPr>
-              <a:t>B.  needs hot rock</a:t>
-            </a:r>
-          </a:p>
-          <a:p>
-            <a:pPr algn="l">
-              <a:spcAft>
-                <a:spcPts val="400"/>
-              </a:spcAft>
-            </a:pPr>
-            <a:r>
-              <a:rPr sz="2800" b="0" i="0">
-                <a:solidFill>
-                  <a:srgbClr val="1F1F1F"/>
-                </a:solidFill>
-                <a:latin typeface="Arial"/>
-              </a:rPr>
-              <a:t>C.  costly to build</a:t>
-            </a:r>
-          </a:p>
-          <a:p>
-            <a:pPr algn="l">
-              <a:spcAft>
-                <a:spcPts val="400"/>
-              </a:spcAft>
-            </a:pPr>
-            <a:r>
-              <a:rPr sz="2800" b="0" i="0">
-                <a:solidFill>
-                  <a:srgbClr val="1F1F1F"/>
-                </a:solidFill>
-                <a:latin typeface="Arial"/>
-              </a:rPr>
-              <a:t>D.  only in some places</a:t>
+              <a:t>B. Areas where Earth's crust is active.</a:t>
             </a:r>
           </a:p>
         </p:txBody>
@@ -4452,7 +4887,7 @@
             <a:avLst/>
           </a:prstGeom>
           <a:solidFill>
-            <a:srgbClr val="3E7A4E"/>
+            <a:srgbClr val="2F3C7E"/>
           </a:solidFill>
           <a:ln>
             <a:noFill/>
@@ -4515,7 +4950,7 @@
                 </a:solidFill>
                 <a:latin typeface="Arial"/>
               </a:rPr>
-              <a:t>Answer</a:t>
+              <a:t>Review</a:t>
             </a:r>
           </a:p>
         </p:txBody>
@@ -4550,11 +4985,11 @@
             <a:r>
               <a:rPr sz="1400" b="0" i="0">
                 <a:solidFill>
-                  <a:srgbClr val="FFFFFF"/>
+                  <a:srgbClr val="C9D2E8"/>
                 </a:solidFill>
                 <a:latin typeface="Arial"/>
               </a:rPr>
-              <a:t>14</a:t>
+              <a:t>13</a:t>
             </a:r>
           </a:p>
         </p:txBody>
@@ -4567,8 +5002,8 @@
         </p:nvSpPr>
         <p:spPr>
           <a:xfrm>
-            <a:off x="822960" y="1645920"/>
-            <a:ext cx="10515600" cy="1828800"/>
+            <a:off x="822960" y="1463040"/>
+            <a:ext cx="10515600" cy="1188720"/>
           </a:xfrm>
           <a:prstGeom prst="rect">
             <a:avLst/>
@@ -4593,7 +5028,94 @@
                 </a:solidFill>
                 <a:latin typeface="Arial"/>
               </a:rPr>
-              <a:t>A. Geothermal produces little pollution.</a:t>
+              <a:t>Which is a BENEFIT of geothermal?</a:t>
+            </a:r>
+          </a:p>
+        </p:txBody>
+      </p:sp>
+      <p:sp>
+        <p:nvSpPr>
+          <p:cNvPr id="7" name="TextBox 6"/>
+          <p:cNvSpPr txBox="1"/>
+          <p:nvPr/>
+        </p:nvSpPr>
+        <p:spPr>
+          <a:xfrm>
+            <a:off x="822960" y="2834640"/>
+            <a:ext cx="10515600" cy="3108960"/>
+          </a:xfrm>
+          <a:prstGeom prst="rect">
+            <a:avLst/>
+          </a:prstGeom>
+          <a:noFill/>
+        </p:spPr>
+        <p:txBody>
+          <a:bodyPr wrap="square" anchor="t">
+            <a:spAutoFit/>
+          </a:bodyPr>
+          <a:lstStyle/>
+          <a:p>
+            <a:pPr algn="l">
+              <a:spcAft>
+                <a:spcPts val="400"/>
+              </a:spcAft>
+            </a:pPr>
+            <a:r>
+              <a:rPr sz="2800" b="0" i="0">
+                <a:solidFill>
+                  <a:srgbClr val="1F1F1F"/>
+                </a:solidFill>
+                <a:latin typeface="Arial"/>
+              </a:rPr>
+              <a:t>A.  little pollution</a:t>
+            </a:r>
+          </a:p>
+          <a:p>
+            <a:pPr algn="l">
+              <a:spcAft>
+                <a:spcPts val="400"/>
+              </a:spcAft>
+            </a:pPr>
+            <a:r>
+              <a:rPr sz="2800" b="0" i="0">
+                <a:solidFill>
+                  <a:srgbClr val="1F1F1F"/>
+                </a:solidFill>
+                <a:latin typeface="Arial"/>
+              </a:rPr>
+              <a:t>B.  needs hot rock</a:t>
+            </a:r>
+          </a:p>
+          <a:p>
+            <a:pPr algn="l">
+              <a:spcAft>
+                <a:spcPts val="400"/>
+              </a:spcAft>
+            </a:pPr>
+            <a:r>
+              <a:rPr sz="2800" b="0" i="0">
+                <a:solidFill>
+                  <a:srgbClr val="1F1F1F"/>
+                </a:solidFill>
+                <a:latin typeface="Arial"/>
+              </a:rPr>
+              <a:t>C.  costly to build</a:t>
+            </a:r>
+          </a:p>
+          <a:p>
+            <a:pPr algn="l">
+              <a:spcAft>
+                <a:spcPts val="400"/>
+              </a:spcAft>
+            </a:pPr>
+            <a:r>
+              <a:rPr sz="2800" b="0" i="0">
+                <a:solidFill>
+                  <a:srgbClr val="1F1F1F"/>
+                </a:solidFill>
+                <a:latin typeface="Arial"/>
+              </a:rPr>
+              <a:t>D.  only in some places</a:t>
             </a:r>
           </a:p>
         </p:txBody>
@@ -4675,7 +5197,7 @@
             <a:avLst/>
           </a:prstGeom>
           <a:solidFill>
-            <a:srgbClr val="2F3C7E"/>
+            <a:srgbClr val="3E7A4E"/>
           </a:solidFill>
           <a:ln>
             <a:noFill/>
@@ -4738,7 +5260,7 @@
                 </a:solidFill>
                 <a:latin typeface="Arial"/>
               </a:rPr>
-              <a:t>Review</a:t>
+              <a:t>Answer</a:t>
             </a:r>
           </a:p>
         </p:txBody>
@@ -4773,11 +5295,11 @@
             <a:r>
               <a:rPr sz="1400" b="0" i="0">
                 <a:solidFill>
-                  <a:srgbClr val="C9D2E8"/>
+                  <a:srgbClr val="FFFFFF"/>
                 </a:solidFill>
                 <a:latin typeface="Arial"/>
               </a:rPr>
-              <a:t>15</a:t>
+              <a:t>14</a:t>
             </a:r>
           </a:p>
         </p:txBody>
@@ -4790,8 +5312,8 @@
         </p:nvSpPr>
         <p:spPr>
           <a:xfrm>
-            <a:off x="822960" y="1463040"/>
-            <a:ext cx="10515600" cy="1188720"/>
+            <a:off x="822960" y="1645920"/>
+            <a:ext cx="10515600" cy="1828800"/>
           </a:xfrm>
           <a:prstGeom prst="rect">
             <a:avLst/>
@@ -4816,94 +5338,7 @@
                 </a:solidFill>
                 <a:latin typeface="Arial"/>
               </a:rPr>
-              <a:t>Which is a LIMITATION of geothermal?</a:t>
-            </a:r>
-          </a:p>
-        </p:txBody>
-      </p:sp>
-      <p:sp>
-        <p:nvSpPr>
-          <p:cNvPr id="7" name="TextBox 6"/>
-          <p:cNvSpPr txBox="1"/>
-          <p:nvPr/>
-        </p:nvSpPr>
-        <p:spPr>
-          <a:xfrm>
-            <a:off x="822960" y="2834640"/>
-            <a:ext cx="10515600" cy="3108960"/>
-          </a:xfrm>
-          <a:prstGeom prst="rect">
-            <a:avLst/>
-          </a:prstGeom>
-          <a:noFill/>
-        </p:spPr>
-        <p:txBody>
-          <a:bodyPr wrap="square" anchor="t">
-            <a:spAutoFit/>
-          </a:bodyPr>
-          <a:lstStyle/>
-          <a:p>
-            <a:pPr algn="l">
-              <a:spcAft>
-                <a:spcPts val="400"/>
-              </a:spcAft>
-            </a:pPr>
-            <a:r>
-              <a:rPr sz="2800" b="0" i="0">
-                <a:solidFill>
-                  <a:srgbClr val="1F1F1F"/>
-                </a:solidFill>
-                <a:latin typeface="Arial"/>
-              </a:rPr>
-              <a:t>A.  clean</a:t>
-            </a:r>
-          </a:p>
-          <a:p>
-            <a:pPr algn="l">
-              <a:spcAft>
-                <a:spcPts val="400"/>
-              </a:spcAft>
-            </a:pPr>
-            <a:r>
-              <a:rPr sz="2800" b="0" i="0">
-                <a:solidFill>
-                  <a:srgbClr val="1F1F1F"/>
-                </a:solidFill>
-                <a:latin typeface="Arial"/>
-              </a:rPr>
-              <a:t>B.  heat is always underground</a:t>
-            </a:r>
-          </a:p>
-          <a:p>
-            <a:pPr algn="l">
-              <a:spcAft>
-                <a:spcPts val="400"/>
-              </a:spcAft>
-            </a:pPr>
-            <a:r>
-              <a:rPr sz="2800" b="0" i="0">
-                <a:solidFill>
-                  <a:srgbClr val="1F1F1F"/>
-                </a:solidFill>
-                <a:latin typeface="Arial"/>
-              </a:rPr>
-              <a:t>C.  needs a special location</a:t>
-            </a:r>
-          </a:p>
-          <a:p>
-            <a:pPr algn="l">
-              <a:spcAft>
-                <a:spcPts val="400"/>
-              </a:spcAft>
-            </a:pPr>
-            <a:r>
-              <a:rPr sz="2800" b="0" i="0">
-                <a:solidFill>
-                  <a:srgbClr val="1F1F1F"/>
-                </a:solidFill>
-                <a:latin typeface="Arial"/>
-              </a:rPr>
-              <a:t>D.  renewable</a:t>
+              <a:t>A. Geothermal produces little pollution.</a:t>
             </a:r>
           </a:p>
         </p:txBody>
@@ -4985,7 +5420,7 @@
             <a:avLst/>
           </a:prstGeom>
           <a:solidFill>
-            <a:srgbClr val="3E7A4E"/>
+            <a:srgbClr val="2F3C7E"/>
           </a:solidFill>
           <a:ln>
             <a:noFill/>
@@ -5048,7 +5483,7 @@
                 </a:solidFill>
                 <a:latin typeface="Arial"/>
               </a:rPr>
-              <a:t>Answer</a:t>
+              <a:t>Review</a:t>
             </a:r>
           </a:p>
         </p:txBody>
@@ -5083,11 +5518,11 @@
             <a:r>
               <a:rPr sz="1400" b="0" i="0">
                 <a:solidFill>
-                  <a:srgbClr val="FFFFFF"/>
+                  <a:srgbClr val="C9D2E8"/>
                 </a:solidFill>
                 <a:latin typeface="Arial"/>
               </a:rPr>
-              <a:t>16</a:t>
+              <a:t>15</a:t>
             </a:r>
           </a:p>
         </p:txBody>
@@ -5100,8 +5535,8 @@
         </p:nvSpPr>
         <p:spPr>
           <a:xfrm>
-            <a:off x="822960" y="1645920"/>
-            <a:ext cx="10515600" cy="1828800"/>
+            <a:off x="822960" y="1463040"/>
+            <a:ext cx="10515600" cy="1188720"/>
           </a:xfrm>
           <a:prstGeom prst="rect">
             <a:avLst/>
@@ -5126,7 +5561,94 @@
                 </a:solidFill>
                 <a:latin typeface="Arial"/>
               </a:rPr>
-              <a:t>C. It needs a special (volcanic) location.</a:t>
+              <a:t>Which is a LIMITATION of geothermal?</a:t>
+            </a:r>
+          </a:p>
+        </p:txBody>
+      </p:sp>
+      <p:sp>
+        <p:nvSpPr>
+          <p:cNvPr id="7" name="TextBox 6"/>
+          <p:cNvSpPr txBox="1"/>
+          <p:nvPr/>
+        </p:nvSpPr>
+        <p:spPr>
+          <a:xfrm>
+            <a:off x="822960" y="2834640"/>
+            <a:ext cx="10515600" cy="3108960"/>
+          </a:xfrm>
+          <a:prstGeom prst="rect">
+            <a:avLst/>
+          </a:prstGeom>
+          <a:noFill/>
+        </p:spPr>
+        <p:txBody>
+          <a:bodyPr wrap="square" anchor="t">
+            <a:spAutoFit/>
+          </a:bodyPr>
+          <a:lstStyle/>
+          <a:p>
+            <a:pPr algn="l">
+              <a:spcAft>
+                <a:spcPts val="400"/>
+              </a:spcAft>
+            </a:pPr>
+            <a:r>
+              <a:rPr sz="2800" b="0" i="0">
+                <a:solidFill>
+                  <a:srgbClr val="1F1F1F"/>
+                </a:solidFill>
+                <a:latin typeface="Arial"/>
+              </a:rPr>
+              <a:t>A.  clean</a:t>
+            </a:r>
+          </a:p>
+          <a:p>
+            <a:pPr algn="l">
+              <a:spcAft>
+                <a:spcPts val="400"/>
+              </a:spcAft>
+            </a:pPr>
+            <a:r>
+              <a:rPr sz="2800" b="0" i="0">
+                <a:solidFill>
+                  <a:srgbClr val="1F1F1F"/>
+                </a:solidFill>
+                <a:latin typeface="Arial"/>
+              </a:rPr>
+              <a:t>B.  heat is always underground</a:t>
+            </a:r>
+          </a:p>
+          <a:p>
+            <a:pPr algn="l">
+              <a:spcAft>
+                <a:spcPts val="400"/>
+              </a:spcAft>
+            </a:pPr>
+            <a:r>
+              <a:rPr sz="2800" b="0" i="0">
+                <a:solidFill>
+                  <a:srgbClr val="1F1F1F"/>
+                </a:solidFill>
+                <a:latin typeface="Arial"/>
+              </a:rPr>
+              <a:t>C.  needs a special location</a:t>
+            </a:r>
+          </a:p>
+          <a:p>
+            <a:pPr algn="l">
+              <a:spcAft>
+                <a:spcPts val="400"/>
+              </a:spcAft>
+            </a:pPr>
+            <a:r>
+              <a:rPr sz="2800" b="0" i="0">
+                <a:solidFill>
+                  <a:srgbClr val="1F1F1F"/>
+                </a:solidFill>
+                <a:latin typeface="Arial"/>
+              </a:rPr>
+              <a:t>D.  renewable</a:t>
             </a:r>
           </a:p>
         </p:txBody>
@@ -5140,7 +5662,7 @@
 </file>
 
 <file path=ppt/slides/slide17.xml><?xml version="1.0" encoding="utf-8"?>
-<p:sld xmlns:a="http://schemas.openxmlformats.org/drawingml/2006/main" xmlns:r="http://schemas.openxmlformats.org/officeDocument/2006/relationships" xmlns:p="http://schemas.openxmlformats.org/presentationml/2006/main">
+<p:sld xmlns:a="http://schemas.openxmlformats.org/drawingml/2006/main" xmlns:p="http://schemas.openxmlformats.org/presentationml/2006/main" xmlns:r="http://schemas.openxmlformats.org/officeDocument/2006/relationships">
   <p:cSld>
     <p:spTree>
       <p:nvGrpSpPr>
@@ -5202,13 +5724,13 @@
         <p:spPr>
           <a:xfrm>
             <a:off x="0" y="0"/>
-            <a:ext cx="12191695" cy="1417320"/>
+            <a:ext cx="12191695" cy="822960"/>
           </a:xfrm>
           <a:prstGeom prst="rect">
             <a:avLst/>
           </a:prstGeom>
           <a:solidFill>
-            <a:srgbClr val="2F3C7E"/>
+            <a:srgbClr val="3E7A4E"/>
           </a:solidFill>
           <a:ln>
             <a:noFill/>
@@ -5245,8 +5767,8 @@
         </p:nvSpPr>
         <p:spPr>
           <a:xfrm>
-            <a:off x="457200" y="109728"/>
-            <a:ext cx="10424160" cy="868680"/>
+            <a:off x="457200" y="146304"/>
+            <a:ext cx="10515600" cy="548640"/>
           </a:xfrm>
           <a:prstGeom prst="rect">
             <a:avLst/>
@@ -5265,13 +5787,13 @@
               </a:spcAft>
             </a:pPr>
             <a:r>
-              <a:rPr sz="3200" b="1">
+              <a:rPr sz="2400" b="1" i="0">
                 <a:solidFill>
                   <a:srgbClr val="FFFFFF"/>
                 </a:solidFill>
                 <a:latin typeface="Arial"/>
               </a:rPr>
-              <a:t>Sunlight &amp; Earth Heat — Solar and Geothermal</a:t>
+              <a:t>Answer</a:t>
             </a:r>
           </a:p>
         </p:txBody>
@@ -5284,8 +5806,8 @@
         </p:nvSpPr>
         <p:spPr>
           <a:xfrm>
-            <a:off x="457200" y="1024128"/>
-            <a:ext cx="10424160" cy="329184"/>
+            <a:off x="10424160" y="256032"/>
+            <a:ext cx="731520" cy="365760"/>
           </a:xfrm>
           <a:prstGeom prst="rect">
             <a:avLst/>
@@ -5293,7 +5815,46 @@
           <a:noFill/>
         </p:spPr>
         <p:txBody>
-          <a:bodyPr wrap="square" anchor="ctr">
+          <a:bodyPr wrap="square" anchor="t">
+            <a:spAutoFit/>
+          </a:bodyPr>
+          <a:lstStyle/>
+          <a:p>
+            <a:pPr algn="r">
+              <a:spcAft>
+                <a:spcPts val="400"/>
+              </a:spcAft>
+            </a:pPr>
+            <a:r>
+              <a:rPr sz="1400" b="0" i="0">
+                <a:solidFill>
+                  <a:srgbClr val="FFFFFF"/>
+                </a:solidFill>
+                <a:latin typeface="Arial"/>
+              </a:rPr>
+              <a:t>16</a:t>
+            </a:r>
+          </a:p>
+        </p:txBody>
+      </p:sp>
+      <p:sp>
+        <p:nvSpPr>
+          <p:cNvPr id="6" name="TextBox 5"/>
+          <p:cNvSpPr txBox="1"/>
+          <p:nvPr/>
+        </p:nvSpPr>
+        <p:spPr>
+          <a:xfrm>
+            <a:off x="822960" y="1645920"/>
+            <a:ext cx="10515600" cy="1828800"/>
+          </a:xfrm>
+          <a:prstGeom prst="rect">
+            <a:avLst/>
+          </a:prstGeom>
+          <a:noFill/>
+        </p:spPr>
+        <p:txBody>
+          <a:bodyPr wrap="square" anchor="t">
             <a:spAutoFit/>
           </a:bodyPr>
           <a:lstStyle/>
@@ -5304,192 +5865,13 @@
               </a:spcAft>
             </a:pPr>
             <a:r>
-              <a:rPr sz="1500" b="0">
-                <a:solidFill>
-                  <a:srgbClr val="C9D2E8"/>
+              <a:rPr sz="3000" b="1" i="0">
+                <a:solidFill>
+                  <a:srgbClr val="1F1F1F"/>
                 </a:solidFill>
                 <a:latin typeface="Arial"/>
               </a:rPr>
-              <a:t>Media placeholder · optional video · pending generation</a:t>
-            </a:r>
-          </a:p>
-        </p:txBody>
-      </p:sp>
-      <p:sp>
-        <p:nvSpPr>
-          <p:cNvPr id="6" name="TextBox 5"/>
-          <p:cNvSpPr txBox="1"/>
-          <p:nvPr/>
-        </p:nvSpPr>
-        <p:spPr>
-          <a:xfrm>
-            <a:off x="10607040" y="310896"/>
-            <a:ext cx="731520" cy="365760"/>
-          </a:xfrm>
-          <a:prstGeom prst="rect">
-            <a:avLst/>
-          </a:prstGeom>
-          <a:noFill/>
-        </p:spPr>
-        <p:txBody>
-          <a:bodyPr wrap="square" anchor="ctr">
-            <a:spAutoFit/>
-          </a:bodyPr>
-          <a:lstStyle/>
-          <a:p>
-            <a:pPr algn="r">
-              <a:spcAft>
-                <a:spcPts val="400"/>
-              </a:spcAft>
-            </a:pPr>
-            <a:r>
-              <a:rPr sz="1500" b="0">
-                <a:solidFill>
-                  <a:srgbClr val="C9D2E8"/>
-                </a:solidFill>
-                <a:latin typeface="Arial"/>
-              </a:rPr>
-              <a:t>9</a:t>
-            </a:r>
-          </a:p>
-        </p:txBody>
-      </p:sp>
-      <p:sp>
-        <p:nvSpPr>
-          <p:cNvPr id="7" name="Rounded Rectangle 6"/>
-          <p:cNvSpPr/>
-          <p:nvPr/>
-        </p:nvSpPr>
-        <p:spPr>
-          <a:xfrm>
-            <a:off x="10972800" y="256032"/>
-            <a:ext cx="1051560" cy="420624"/>
-          </a:xfrm>
-          <a:prstGeom prst="roundRect">
-            <a:avLst/>
-          </a:prstGeom>
-          <a:solidFill>
-            <a:srgbClr val="2F3C7E"/>
-          </a:solidFill>
-          <a:ln>
-            <a:noFill/>
-          </a:ln>
-          <a:effectLst/>
-        </p:spPr>
-        <p:style>
-          <a:lnRef idx="1">
-            <a:schemeClr val="accent1"/>
-          </a:lnRef>
-          <a:fillRef idx="3">
-            <a:schemeClr val="accent1"/>
-          </a:fillRef>
-          <a:effectRef idx="2">
-            <a:schemeClr val="accent1"/>
-          </a:effectRef>
-          <a:fontRef idx="minor">
-            <a:schemeClr val="lt1"/>
-          </a:fontRef>
-        </p:style>
-        <p:txBody>
-          <a:bodyPr rtlCol="0" anchor="ctr" wrap="none"/>
-          <a:lstStyle/>
-          <a:p>
-            <a:pPr algn="ctr"/>
-            <a:r>
-              <a:rPr sz="1100" b="1">
-                <a:solidFill>
-                  <a:srgbClr val="FFFFFF"/>
-                </a:solidFill>
-                <a:latin typeface="Arial"/>
-              </a:rPr>
-              <a:t>PLACEHOLDER</a:t>
-            </a:r>
-          </a:p>
-        </p:txBody>
-      </p:sp>
-      <p:sp>
-        <p:nvSpPr>
-          <p:cNvPr id="8" name="TextBox 7"/>
-          <p:cNvSpPr txBox="1"/>
-          <p:nvPr/>
-        </p:nvSpPr>
-        <p:spPr>
-          <a:xfrm>
-            <a:off x="822960" y="1700000"/>
-            <a:ext cx="10515600" cy="4400000"/>
-          </a:xfrm>
-          <a:prstGeom prst="rect">
-            <a:avLst/>
-          </a:prstGeom>
-          <a:noFill/>
-        </p:spPr>
-        <p:txBody>
-          <a:bodyPr wrap="square">
-            <a:spAutoFit/>
-          </a:bodyPr>
-          <a:lstStyle/>
-          <a:p>
-            <a:pPr>
-              <a:spcAft>
-                <a:spcPts val="1000"/>
-              </a:spcAft>
-            </a:pPr>
-            <a:r>
-              <a:rPr sz="2000" b="1">
-                <a:solidFill>
-                  <a:srgbClr val="1F1F1F"/>
-                </a:solidFill>
-                <a:latin typeface="Arial"/>
-              </a:rPr>
-              <a:t>Intended: ~2-minute compare/contrast clip (Week 8 Tuesday).</a:t>
-            </a:r>
-          </a:p>
-          <a:p>
-            <a:pPr>
-              <a:spcAft>
-                <a:spcPts val="1000"/>
-              </a:spcAft>
-            </a:pPr>
-            <a:r>
-              <a:rPr sz="2000" b="0">
-                <a:solidFill>
-                  <a:srgbClr val="1F1F1F"/>
-                </a:solidFill>
-                <a:latin typeface="Arial"/>
-              </a:rPr>
-              <a:t>Script ready: production/media/scripts/unit-02/07-solar-geothermal-final-script.md</a:t>
-            </a:r>
-          </a:p>
-          <a:p>
-            <a:pPr>
-              <a:spcAft>
-                <a:spcPts val="1000"/>
-              </a:spcAft>
-            </a:pPr>
-            <a:r>
-              <a:rPr sz="2000" b="0">
-                <a:solidFill>
-                  <a:srgbClr val="1F1F1F"/>
-                </a:solidFill>
-                <a:latin typeface="Arial"/>
-              </a:rPr>
-              <a:t>Covers: solar depends on available light; geothermal depends on underground heat.</a:t>
-            </a:r>
-          </a:p>
-          <a:p>
-            <a:pPr>
-              <a:spcAft>
-                <a:spcPts val="1000"/>
-              </a:spcAft>
-            </a:pPr>
-            <a:r>
-              <a:rPr sz="2000" b="0">
-                <a:solidFill>
-                  <a:srgbClr val="1F1F1F"/>
-                </a:solidFill>
-                <a:latin typeface="Arial"/>
-              </a:rPr>
-              <a:t>This slide is a drop-in slot — the deck teaches fully without the video.</a:t>
+              <a:t>C. It needs a special (volcanic) location.</a:t>
             </a:r>
           </a:p>
         </p:txBody>
@@ -7812,7 +8194,7 @@
 </file>
 
 <file path=ppt/slides/slide9.xml><?xml version="1.0" encoding="utf-8"?>
-<p:sld xmlns:a="http://schemas.openxmlformats.org/drawingml/2006/main" xmlns:p="http://schemas.openxmlformats.org/presentationml/2006/main" xmlns:r="http://schemas.openxmlformats.org/officeDocument/2006/relationships">
+<p:sld xmlns:a="http://schemas.openxmlformats.org/drawingml/2006/main" xmlns:r="http://schemas.openxmlformats.org/officeDocument/2006/relationships" xmlns:p="http://schemas.openxmlformats.org/presentationml/2006/main">
   <p:cSld>
     <p:spTree>
       <p:nvGrpSpPr>
@@ -7874,7 +8256,7 @@
         <p:spPr>
           <a:xfrm>
             <a:off x="0" y="0"/>
-            <a:ext cx="12191695" cy="822960"/>
+            <a:ext cx="12191695" cy="1417320"/>
           </a:xfrm>
           <a:prstGeom prst="rect">
             <a:avLst/>
@@ -7917,8 +8299,8 @@
         </p:nvSpPr>
         <p:spPr>
           <a:xfrm>
-            <a:off x="457200" y="146304"/>
-            <a:ext cx="10515600" cy="548640"/>
+            <a:off x="457200" y="109728"/>
+            <a:ext cx="10424160" cy="868680"/>
           </a:xfrm>
           <a:prstGeom prst="rect">
             <a:avLst/>
@@ -7937,13 +8319,13 @@
               </a:spcAft>
             </a:pPr>
             <a:r>
-              <a:rPr sz="2400" b="1" i="0">
+              <a:rPr sz="3200" b="1">
                 <a:solidFill>
                   <a:srgbClr val="FFFFFF"/>
                 </a:solidFill>
                 <a:latin typeface="Arial"/>
               </a:rPr>
-              <a:t>Review</a:t>
+              <a:t>Sunlight &amp; Earth Heat — Solar and Geothermal</a:t>
             </a:r>
           </a:p>
         </p:txBody>
@@ -7956,7 +8338,46 @@
         </p:nvSpPr>
         <p:spPr>
           <a:xfrm>
-            <a:off x="10424160" y="256032"/>
+            <a:off x="457200" y="1024128"/>
+            <a:ext cx="10424160" cy="329184"/>
+          </a:xfrm>
+          <a:prstGeom prst="rect">
+            <a:avLst/>
+          </a:prstGeom>
+          <a:noFill/>
+        </p:spPr>
+        <p:txBody>
+          <a:bodyPr wrap="square" anchor="ctr">
+            <a:spAutoFit/>
+          </a:bodyPr>
+          <a:lstStyle/>
+          <a:p>
+            <a:pPr algn="l">
+              <a:spcAft>
+                <a:spcPts val="400"/>
+              </a:spcAft>
+            </a:pPr>
+            <a:r>
+              <a:rPr sz="1500" b="0">
+                <a:solidFill>
+                  <a:srgbClr val="C9D2E8"/>
+                </a:solidFill>
+                <a:latin typeface="Arial"/>
+              </a:rPr>
+              <a:t>Optional video · Week 8 Tuesday</a:t>
+            </a:r>
+          </a:p>
+        </p:txBody>
+      </p:sp>
+      <p:sp>
+        <p:nvSpPr>
+          <p:cNvPr id="6" name="TextBox 5"/>
+          <p:cNvSpPr txBox="1"/>
+          <p:nvPr/>
+        </p:nvSpPr>
+        <p:spPr>
+          <a:xfrm>
+            <a:off x="10607040" y="310896"/>
             <a:ext cx="731520" cy="365760"/>
           </a:xfrm>
           <a:prstGeom prst="rect">
@@ -7965,7 +8386,7 @@
           <a:noFill/>
         </p:spPr>
         <p:txBody>
-          <a:bodyPr wrap="square" anchor="t">
+          <a:bodyPr wrap="square" anchor="ctr">
             <a:spAutoFit/>
           </a:bodyPr>
           <a:lstStyle/>
@@ -7976,7 +8397,7 @@
               </a:spcAft>
             </a:pPr>
             <a:r>
-              <a:rPr sz="1400" b="0" i="0">
+              <a:rPr sz="1500" b="0">
                 <a:solidFill>
                   <a:srgbClr val="C9D2E8"/>
                 </a:solidFill>
@@ -7989,14 +8410,67 @@
       </p:sp>
       <p:sp>
         <p:nvSpPr>
-          <p:cNvPr id="6" name="TextBox 5"/>
+          <p:cNvPr id="7" name="Rounded Rectangle 6"/>
+          <p:cNvSpPr/>
+          <p:nvPr/>
+        </p:nvSpPr>
+        <p:spPr>
+          <a:xfrm>
+            <a:off x="10972800" y="256032"/>
+            <a:ext cx="1051560" cy="420624"/>
+          </a:xfrm>
+          <a:prstGeom prst="roundRect">
+            <a:avLst/>
+          </a:prstGeom>
+          <a:solidFill>
+            <a:srgbClr val="2F3C7E"/>
+          </a:solidFill>
+          <a:ln>
+            <a:noFill/>
+          </a:ln>
+          <a:effectLst/>
+        </p:spPr>
+        <p:style>
+          <a:lnRef idx="1">
+            <a:schemeClr val="accent1"/>
+          </a:lnRef>
+          <a:fillRef idx="3">
+            <a:schemeClr val="accent1"/>
+          </a:fillRef>
+          <a:effectRef idx="2">
+            <a:schemeClr val="accent1"/>
+          </a:effectRef>
+          <a:fontRef idx="minor">
+            <a:schemeClr val="lt1"/>
+          </a:fontRef>
+        </p:style>
+        <p:txBody>
+          <a:bodyPr rtlCol="0" anchor="ctr" wrap="square"/>
+          <a:lstStyle/>
+          <a:p>
+            <a:pPr algn="ctr"/>
+            <a:r>
+              <a:rPr sz="1100" b="1">
+                <a:solidFill>
+                  <a:srgbClr val="FFFFFF"/>
+                </a:solidFill>
+                <a:latin typeface="Arial"/>
+              </a:rPr>
+              <a:t>WATCH</a:t>
+            </a:r>
+          </a:p>
+        </p:txBody>
+      </p:sp>
+      <p:sp>
+        <p:nvSpPr>
+          <p:cNvPr id="8" name="TextBox 7"/>
           <p:cNvSpPr txBox="1"/>
           <p:nvPr/>
         </p:nvSpPr>
         <p:spPr>
           <a:xfrm>
-            <a:off x="822960" y="1463040"/>
-            <a:ext cx="10515600" cy="1188720"/>
+            <a:off x="457200" y="6500000"/>
+            <a:ext cx="11277295" cy="300000"/>
           </a:xfrm>
           <a:prstGeom prst="rect">
             <a:avLst/>
@@ -8004,112 +8478,153 @@
           <a:noFill/>
         </p:spPr>
         <p:txBody>
-          <a:bodyPr wrap="square" anchor="t">
+          <a:bodyPr wrap="square">
             <a:spAutoFit/>
           </a:bodyPr>
           <a:lstStyle/>
           <a:p>
-            <a:pPr algn="l">
-              <a:spcAft>
-                <a:spcPts val="400"/>
-              </a:spcAft>
-            </a:pPr>
-            <a:r>
-              <a:rPr sz="3000" b="1" i="0">
-                <a:solidFill>
-                  <a:srgbClr val="1F1F1F"/>
+            <a:pPr algn="ctr"/>
+            <a:r>
+              <a:rPr sz="1800" b="1">
+                <a:solidFill>
+                  <a:srgbClr val="2F3C7E"/>
                 </a:solidFill>
                 <a:latin typeface="Arial"/>
               </a:rPr>
-              <a:t>Geothermal energy comes from —</a:t>
-            </a:r>
-          </a:p>
-        </p:txBody>
-      </p:sp>
-      <p:sp>
-        <p:nvSpPr>
-          <p:cNvPr id="7" name="TextBox 6"/>
-          <p:cNvSpPr txBox="1"/>
-          <p:nvPr/>
-        </p:nvSpPr>
-        <p:spPr>
-          <a:xfrm>
-            <a:off x="822960" y="2834640"/>
-            <a:ext cx="10515600" cy="3108960"/>
-          </a:xfrm>
-          <a:prstGeom prst="rect">
-            <a:avLst/>
-          </a:prstGeom>
-          <a:noFill/>
-        </p:spPr>
-        <p:txBody>
-          <a:bodyPr wrap="square" anchor="t">
-            <a:spAutoFit/>
-          </a:bodyPr>
-          <a:lstStyle/>
-          <a:p>
-            <a:pPr algn="l">
-              <a:spcAft>
-                <a:spcPts val="400"/>
-              </a:spcAft>
-            </a:pPr>
-            <a:r>
-              <a:rPr sz="2800" b="0" i="0">
-                <a:solidFill>
-                  <a:srgbClr val="1F1F1F"/>
-                </a:solidFill>
-                <a:latin typeface="Arial"/>
-              </a:rPr>
-              <a:t>A.  the sun</a:t>
-            </a:r>
-          </a:p>
-          <a:p>
-            <a:pPr algn="l">
-              <a:spcAft>
-                <a:spcPts val="400"/>
-              </a:spcAft>
-            </a:pPr>
-            <a:r>
-              <a:rPr sz="2800" b="0" i="0">
-                <a:solidFill>
-                  <a:srgbClr val="1F1F1F"/>
-                </a:solidFill>
-                <a:latin typeface="Arial"/>
-              </a:rPr>
-              <a:t>B.  wind</a:t>
-            </a:r>
-          </a:p>
-          <a:p>
-            <a:pPr algn="l">
-              <a:spcAft>
-                <a:spcPts val="400"/>
-              </a:spcAft>
-            </a:pPr>
-            <a:r>
-              <a:rPr sz="2800" b="0" i="0">
-                <a:solidFill>
-                  <a:srgbClr val="1F1F1F"/>
-                </a:solidFill>
-                <a:latin typeface="Arial"/>
-              </a:rPr>
-              <a:t>C.  heat inside Earth</a:t>
-            </a:r>
-          </a:p>
-          <a:p>
-            <a:pPr algn="l">
-              <a:spcAft>
-                <a:spcPts val="400"/>
-              </a:spcAft>
-            </a:pPr>
-            <a:r>
-              <a:rPr sz="2800" b="0" i="0">
-                <a:solidFill>
-                  <a:srgbClr val="1F1F1F"/>
-                </a:solidFill>
-                <a:latin typeface="Arial"/>
-              </a:rPr>
-              <a:t>D.  moving water</a:t>
-            </a:r>
+              <a:t>THINK: What does each energy source depend on?</a:t>
+            </a:r>
+          </a:p>
+        </p:txBody>
+      </p:sp>
+      <p:sp>
+        <p:nvSpPr>
+          <p:cNvPr id="9" name="Rounded Rectangle 8"/>
+          <p:cNvSpPr/>
+          <p:nvPr/>
+        </p:nvSpPr>
+        <p:spPr>
+          <a:xfrm>
+            <a:off x="1895847" y="1720000"/>
+            <a:ext cx="8400000" cy="4725000"/>
+          </a:xfrm>
+          <a:prstGeom prst="roundRect">
+            <a:avLst/>
+          </a:prstGeom>
+          <a:solidFill>
+            <a:srgbClr val="E8ECF6"/>
+          </a:solidFill>
+          <a:ln>
+            <a:noFill/>
+          </a:ln>
+          <a:effectLst/>
+        </p:spPr>
+        <p:style>
+          <a:lnRef idx="1">
+            <a:schemeClr val="accent1"/>
+          </a:lnRef>
+          <a:fillRef idx="3">
+            <a:schemeClr val="accent1"/>
+          </a:fillRef>
+          <a:effectRef idx="2">
+            <a:schemeClr val="accent1"/>
+          </a:effectRef>
+          <a:fontRef idx="minor">
+            <a:schemeClr val="lt1"/>
+          </a:fontRef>
+        </p:style>
+        <p:txBody>
+          <a:bodyPr rtlCol="0" anchor="ctr"/>
+          <a:lstStyle/>
+          <a:p>
+            <a:pPr algn="ctr"/>
+          </a:p>
+        </p:txBody>
+      </p:sp>
+      <p:sp>
+        <p:nvSpPr>
+          <p:cNvPr id="10" name="Oval 9"/>
+          <p:cNvSpPr/>
+          <p:nvPr/>
+        </p:nvSpPr>
+        <p:spPr>
+          <a:xfrm>
+            <a:off x="5410047" y="3396700"/>
+            <a:ext cx="1371600" cy="1371600"/>
+          </a:xfrm>
+          <a:prstGeom prst="ellipse">
+            <a:avLst/>
+          </a:prstGeom>
+          <a:solidFill>
+            <a:srgbClr val="2F3C7E"/>
+          </a:solidFill>
+          <a:ln>
+            <a:noFill/>
+          </a:ln>
+          <a:effectLst/>
+        </p:spPr>
+        <p:style>
+          <a:lnRef idx="1">
+            <a:schemeClr val="accent1"/>
+          </a:lnRef>
+          <a:fillRef idx="3">
+            <a:schemeClr val="accent1"/>
+          </a:fillRef>
+          <a:effectRef idx="2">
+            <a:schemeClr val="accent1"/>
+          </a:effectRef>
+          <a:fontRef idx="minor">
+            <a:schemeClr val="lt1"/>
+          </a:fontRef>
+        </p:style>
+        <p:txBody>
+          <a:bodyPr rtlCol="0" anchor="ctr"/>
+          <a:lstStyle/>
+          <a:p>
+            <a:pPr algn="ctr"/>
+          </a:p>
+        </p:txBody>
+      </p:sp>
+      <p:sp>
+        <p:nvSpPr>
+          <p:cNvPr id="11" name="Isosceles Triangle 10"/>
+          <p:cNvSpPr/>
+          <p:nvPr/>
+        </p:nvSpPr>
+        <p:spPr>
+          <a:xfrm rot="5400000">
+            <a:off x="5821527" y="3808180"/>
+            <a:ext cx="548640" cy="548640"/>
+          </a:xfrm>
+          <a:prstGeom prst="triangle">
+            <a:avLst/>
+          </a:prstGeom>
+          <a:solidFill>
+            <a:srgbClr val="FFFFFF"/>
+          </a:solidFill>
+          <a:ln>
+            <a:noFill/>
+          </a:ln>
+          <a:effectLst/>
+        </p:spPr>
+        <p:style>
+          <a:lnRef idx="1">
+            <a:schemeClr val="accent1"/>
+          </a:lnRef>
+          <a:fillRef idx="3">
+            <a:schemeClr val="accent1"/>
+          </a:fillRef>
+          <a:effectRef idx="2">
+            <a:schemeClr val="accent1"/>
+          </a:effectRef>
+          <a:fontRef idx="minor">
+            <a:schemeClr val="lt1"/>
+          </a:fontRef>
+        </p:style>
+        <p:txBody>
+          <a:bodyPr rtlCol="0" anchor="ctr"/>
+          <a:lstStyle/>
+          <a:p>
+            <a:pPr algn="ctr"/>
           </a:p>
         </p:txBody>
       </p:sp>
@@ -8439,4 +8954,324 @@
   </a:objectDefaults>
   <a:extraClrSchemeLst/>
 </a:theme>
+</file>
+
+<file path=ppt/theme/theme2.xml><?xml version="1.0" encoding="utf-8"?>
+<a:theme xmlns:a="http://schemas.openxmlformats.org/drawingml/2006/main" name="Office Theme">
+  <a:themeElements>
+    <a:clrScheme name="Office">
+      <a:dk1>
+        <a:sysClr val="windowText" lastClr="000000"/>
+      </a:dk1>
+      <a:lt1>
+        <a:sysClr val="window" lastClr="FFFFFF"/>
+      </a:lt1>
+      <a:dk2>
+        <a:srgbClr val="1F497D"/>
+      </a:dk2>
+      <a:lt2>
+        <a:srgbClr val="EEECE1"/>
+      </a:lt2>
+      <a:accent1>
+        <a:srgbClr val="4F81BD"/>
+      </a:accent1>
+      <a:accent2>
+        <a:srgbClr val="C0504D"/>
+      </a:accent2>
+      <a:accent3>
+        <a:srgbClr val="9BBB59"/>
+      </a:accent3>
+      <a:accent4>
+        <a:srgbClr val="8064A2"/>
+      </a:accent4>
+      <a:accent5>
+        <a:srgbClr val="4BACC6"/>
+      </a:accent5>
+      <a:accent6>
+        <a:srgbClr val="F79646"/>
+      </a:accent6>
+      <a:hlink>
+        <a:srgbClr val="0000FF"/>
+      </a:hlink>
+      <a:folHlink>
+        <a:srgbClr val="800080"/>
+      </a:folHlink>
+    </a:clrScheme>
+    <a:fontScheme name="Office">
+      <a:majorFont>
+        <a:latin typeface="Calibri"/>
+        <a:ea typeface=""/>
+        <a:cs typeface=""/>
+        <a:font script="Jpan" typeface="ＭＳ Ｐゴシック"/>
+        <a:font script="Hang" typeface="맑은 고딕"/>
+        <a:font script="Hans" typeface="宋体"/>
+        <a:font script="Hant" typeface="新細明體"/>
+        <a:font script="Arab" typeface="Times New Roman"/>
+        <a:font script="Hebr" typeface="Times New Roman"/>
+        <a:font script="Thai" typeface="Angsana New"/>
+        <a:font script="Ethi" typeface="Nyala"/>
+        <a:font script="Beng" typeface="Vrinda"/>
+        <a:font script="Gujr" typeface="Shruti"/>
+        <a:font script="Khmr" typeface="MoolBoran"/>
+        <a:font script="Knda" typeface="Tunga"/>
+        <a:font script="Guru" typeface="Raavi"/>
+        <a:font script="Cans" typeface="Euphemia"/>
+        <a:font script="Cher" typeface="Plantagenet Cherokee"/>
+        <a:font script="Yiii" typeface="Microsoft Yi Baiti"/>
+        <a:font script="Tibt" typeface="Microsoft Himalaya"/>
+        <a:font script="Thaa" typeface="MV Boli"/>
+        <a:font script="Deva" typeface="Mangal"/>
+        <a:font script="Telu" typeface="Gautami"/>
+        <a:font script="Taml" typeface="Latha"/>
+        <a:font script="Syrc" typeface="Estrangelo Edessa"/>
+        <a:font script="Orya" typeface="Kalinga"/>
+        <a:font script="Mlym" typeface="Kartika"/>
+        <a:font script="Laoo" typeface="DokChampa"/>
+        <a:font script="Sinh" typeface="Iskoola Pota"/>
+        <a:font script="Mong" typeface="Mongolian Baiti"/>
+        <a:font script="Viet" typeface="Times New Roman"/>
+        <a:font script="Uigh" typeface="Microsoft Uighur"/>
+        <a:font script="Geor" typeface="Sylfaen"/>
+      </a:majorFont>
+      <a:minorFont>
+        <a:latin typeface="Calibri"/>
+        <a:ea typeface=""/>
+        <a:cs typeface=""/>
+        <a:font script="Jpan" typeface="ＭＳ Ｐゴシック"/>
+        <a:font script="Hang" typeface="맑은 고딕"/>
+        <a:font script="Hans" typeface="宋体"/>
+        <a:font script="Hant" typeface="新細明體"/>
+        <a:font script="Arab" typeface="Arial"/>
+        <a:font script="Hebr" typeface="Arial"/>
+        <a:font script="Thai" typeface="Cordia New"/>
+        <a:font script="Ethi" typeface="Nyala"/>
+        <a:font script="Beng" typeface="Vrinda"/>
+        <a:font script="Gujr" typeface="Shruti"/>
+        <a:font script="Khmr" typeface="DaunPenh"/>
+        <a:font script="Knda" typeface="Tunga"/>
+        <a:font script="Guru" typeface="Raavi"/>
+        <a:font script="Cans" typeface="Euphemia"/>
+        <a:font script="Cher" typeface="Plantagenet Cherokee"/>
+        <a:font script="Yiii" typeface="Microsoft Yi Baiti"/>
+        <a:font script="Tibt" typeface="Microsoft Himalaya"/>
+        <a:font script="Thaa" typeface="MV Boli"/>
+        <a:font script="Deva" typeface="Mangal"/>
+        <a:font script="Telu" typeface="Gautami"/>
+        <a:font script="Taml" typeface="Latha"/>
+        <a:font script="Syrc" typeface="Estrangelo Edessa"/>
+        <a:font script="Orya" typeface="Kalinga"/>
+        <a:font script="Mlym" typeface="Kartika"/>
+        <a:font script="Laoo" typeface="DokChampa"/>
+        <a:font script="Sinh" typeface="Iskoola Pota"/>
+        <a:font script="Mong" typeface="Mongolian Baiti"/>
+        <a:font script="Viet" typeface="Arial"/>
+        <a:font script="Uigh" typeface="Microsoft Uighur"/>
+        <a:font script="Geor" typeface="Sylfaen"/>
+      </a:minorFont>
+    </a:fontScheme>
+    <a:fmtScheme name="Office">
+      <a:fillStyleLst>
+        <a:solidFill>
+          <a:schemeClr val="phClr"/>
+        </a:solidFill>
+        <a:gradFill rotWithShape="1">
+          <a:gsLst>
+            <a:gs pos="0">
+              <a:schemeClr val="phClr">
+                <a:tint val="50000"/>
+                <a:satMod val="300000"/>
+              </a:schemeClr>
+            </a:gs>
+            <a:gs pos="35000">
+              <a:schemeClr val="phClr">
+                <a:tint val="37000"/>
+                <a:satMod val="300000"/>
+              </a:schemeClr>
+            </a:gs>
+            <a:gs pos="100000">
+              <a:schemeClr val="phClr">
+                <a:tint val="15000"/>
+                <a:satMod val="350000"/>
+              </a:schemeClr>
+            </a:gs>
+          </a:gsLst>
+          <a:lin ang="16200000" scaled="1"/>
+        </a:gradFill>
+        <a:gradFill rotWithShape="1">
+          <a:gsLst>
+            <a:gs pos="0">
+              <a:schemeClr val="phClr">
+                <a:tint val="100000"/>
+                <a:shade val="100000"/>
+                <a:satMod val="130000"/>
+              </a:schemeClr>
+            </a:gs>
+            <a:gs pos="100000">
+              <a:schemeClr val="phClr">
+                <a:tint val="50000"/>
+                <a:shade val="100000"/>
+                <a:satMod val="350000"/>
+              </a:schemeClr>
+            </a:gs>
+          </a:gsLst>
+          <a:lin ang="16200000" scaled="0"/>
+        </a:gradFill>
+      </a:fillStyleLst>
+      <a:lnStyleLst>
+        <a:ln w="9525" cap="flat" cmpd="sng" algn="ctr">
+          <a:solidFill>
+            <a:schemeClr val="phClr">
+              <a:shade val="95000"/>
+              <a:satMod val="105000"/>
+            </a:schemeClr>
+          </a:solidFill>
+          <a:prstDash val="solid"/>
+        </a:ln>
+        <a:ln w="25400" cap="flat" cmpd="sng" algn="ctr">
+          <a:solidFill>
+            <a:schemeClr val="phClr"/>
+          </a:solidFill>
+          <a:prstDash val="solid"/>
+        </a:ln>
+        <a:ln w="38100" cap="flat" cmpd="sng" algn="ctr">
+          <a:solidFill>
+            <a:schemeClr val="phClr"/>
+          </a:solidFill>
+          <a:prstDash val="solid"/>
+        </a:ln>
+      </a:lnStyleLst>
+      <a:effectStyleLst>
+        <a:effectStyle>
+          <a:effectLst>
+            <a:outerShdw blurRad="40000" dist="20000" dir="5400000" rotWithShape="0">
+              <a:srgbClr val="000000">
+                <a:alpha val="38000"/>
+              </a:srgbClr>
+            </a:outerShdw>
+          </a:effectLst>
+        </a:effectStyle>
+        <a:effectStyle>
+          <a:effectLst>
+            <a:outerShdw blurRad="40000" dist="23000" dir="5400000" rotWithShape="0">
+              <a:srgbClr val="000000">
+                <a:alpha val="35000"/>
+              </a:srgbClr>
+            </a:outerShdw>
+          </a:effectLst>
+        </a:effectStyle>
+        <a:effectStyle>
+          <a:effectLst>
+            <a:outerShdw blurRad="40000" dist="23000" dir="5400000" rotWithShape="0">
+              <a:srgbClr val="000000">
+                <a:alpha val="35000"/>
+              </a:srgbClr>
+            </a:outerShdw>
+          </a:effectLst>
+          <a:scene3d>
+            <a:camera prst="orthographicFront">
+              <a:rot lat="0" lon="0" rev="0"/>
+            </a:camera>
+            <a:lightRig rig="threePt" dir="t">
+              <a:rot lat="0" lon="0" rev="1200000"/>
+            </a:lightRig>
+          </a:scene3d>
+          <a:sp3d>
+            <a:bevelT w="63500" h="25400"/>
+          </a:sp3d>
+        </a:effectStyle>
+      </a:effectStyleLst>
+      <a:bgFillStyleLst>
+        <a:solidFill>
+          <a:schemeClr val="phClr"/>
+        </a:solidFill>
+        <a:gradFill rotWithShape="1">
+          <a:gsLst>
+            <a:gs pos="0">
+              <a:schemeClr val="phClr">
+                <a:tint val="40000"/>
+                <a:satMod val="350000"/>
+              </a:schemeClr>
+            </a:gs>
+            <a:gs pos="40000">
+              <a:schemeClr val="phClr">
+                <a:tint val="45000"/>
+                <a:shade val="99000"/>
+                <a:satMod val="350000"/>
+              </a:schemeClr>
+            </a:gs>
+            <a:gs pos="100000">
+              <a:schemeClr val="phClr">
+                <a:shade val="20000"/>
+                <a:satMod val="255000"/>
+              </a:schemeClr>
+            </a:gs>
+          </a:gsLst>
+          <a:path path="circle">
+            <a:fillToRect l="50000" t="-80000" r="50000" b="180000"/>
+          </a:path>
+        </a:gradFill>
+        <a:gradFill rotWithShape="1">
+          <a:gsLst>
+            <a:gs pos="0">
+              <a:schemeClr val="phClr">
+                <a:tint val="80000"/>
+                <a:satMod val="300000"/>
+              </a:schemeClr>
+            </a:gs>
+            <a:gs pos="100000">
+              <a:schemeClr val="phClr">
+                <a:shade val="30000"/>
+                <a:satMod val="200000"/>
+              </a:schemeClr>
+            </a:gs>
+          </a:gsLst>
+          <a:path path="circle">
+            <a:fillToRect l="50000" t="50000" r="50000" b="50000"/>
+          </a:path>
+        </a:gradFill>
+      </a:bgFillStyleLst>
+    </a:fmtScheme>
+  </a:themeElements>
+  <a:objectDefaults>
+    <a:spDef>
+      <a:spPr/>
+      <a:bodyPr/>
+      <a:lstStyle/>
+      <a:style>
+        <a:lnRef idx="1">
+          <a:schemeClr val="accent1"/>
+        </a:lnRef>
+        <a:fillRef idx="3">
+          <a:schemeClr val="accent1"/>
+        </a:fillRef>
+        <a:effectRef idx="2">
+          <a:schemeClr val="accent1"/>
+        </a:effectRef>
+        <a:fontRef idx="minor">
+          <a:schemeClr val="lt1"/>
+        </a:fontRef>
+      </a:style>
+    </a:spDef>
+    <a:lnDef>
+      <a:spPr/>
+      <a:bodyPr/>
+      <a:lstStyle/>
+      <a:style>
+        <a:lnRef idx="2">
+          <a:schemeClr val="accent1"/>
+        </a:lnRef>
+        <a:fillRef idx="0">
+          <a:schemeClr val="accent1"/>
+        </a:fillRef>
+        <a:effectRef idx="1">
+          <a:schemeClr val="accent1"/>
+        </a:effectRef>
+        <a:fontRef idx="minor">
+          <a:schemeClr val="tx1"/>
+        </a:fontRef>
+      </a:style>
+    </a:lnDef>
+  </a:objectDefaults>
+  <a:extraClrSchemeLst/>
+</a:theme>
 </file>